--- a/quy-gan-rag-hai-tang.pptx
+++ b/quy-gan-rag-hai-tang.pptx
@@ -12,32 +12,32 @@
     <p:sldId id="262" r:id="rId6"/>
     <p:sldId id="263" r:id="rId7"/>
     <p:sldId id="277" r:id="rId8"/>
-    <p:sldId id="289" r:id="rId37"/>
-    <p:sldId id="290" r:id="rId38"/>
-    <p:sldId id="278" r:id="rId9"/>
-    <p:sldId id="287" r:id="rId35"/>
-    <p:sldId id="288" r:id="rId36"/>
-    <p:sldId id="279" r:id="rId10"/>
-    <p:sldId id="259" r:id="rId11"/>
-    <p:sldId id="264" r:id="rId12"/>
-    <p:sldId id="265" r:id="rId13"/>
-    <p:sldId id="266" r:id="rId14"/>
-    <p:sldId id="267" r:id="rId15"/>
-    <p:sldId id="280" r:id="rId16"/>
-    <p:sldId id="281" r:id="rId17"/>
-    <p:sldId id="268" r:id="rId18"/>
-    <p:sldId id="269" r:id="rId19"/>
-    <p:sldId id="282" r:id="rId20"/>
-    <p:sldId id="276" r:id="rId21"/>
-    <p:sldId id="270" r:id="rId22"/>
-    <p:sldId id="283" r:id="rId23"/>
-    <p:sldId id="284" r:id="rId24"/>
-    <p:sldId id="271" r:id="rId25"/>
-    <p:sldId id="272" r:id="rId26"/>
-    <p:sldId id="285" r:id="rId27"/>
-    <p:sldId id="273" r:id="rId28"/>
-    <p:sldId id="274" r:id="rId29"/>
-    <p:sldId id="275" r:id="rId30"/>
+    <p:sldId id="289" r:id="rId9"/>
+    <p:sldId id="290" r:id="rId10"/>
+    <p:sldId id="278" r:id="rId11"/>
+    <p:sldId id="287" r:id="rId12"/>
+    <p:sldId id="288" r:id="rId13"/>
+    <p:sldId id="279" r:id="rId14"/>
+    <p:sldId id="259" r:id="rId15"/>
+    <p:sldId id="264" r:id="rId16"/>
+    <p:sldId id="265" r:id="rId17"/>
+    <p:sldId id="266" r:id="rId18"/>
+    <p:sldId id="267" r:id="rId19"/>
+    <p:sldId id="280" r:id="rId20"/>
+    <p:sldId id="281" r:id="rId21"/>
+    <p:sldId id="268" r:id="rId22"/>
+    <p:sldId id="269" r:id="rId23"/>
+    <p:sldId id="282" r:id="rId24"/>
+    <p:sldId id="276" r:id="rId25"/>
+    <p:sldId id="270" r:id="rId26"/>
+    <p:sldId id="283" r:id="rId27"/>
+    <p:sldId id="284" r:id="rId28"/>
+    <p:sldId id="271" r:id="rId29"/>
+    <p:sldId id="272" r:id="rId30"/>
+    <p:sldId id="285" r:id="rId31"/>
+    <p:sldId id="273" r:id="rId32"/>
+    <p:sldId id="274" r:id="rId33"/>
+    <p:sldId id="275" r:id="rId34"/>
   </p:sldIdLst>
   <p:sldSz cx="12192000" cy="6858000"/>
   <p:notesSz cx="6858000" cy="9144000"/>
@@ -334,7 +334,7 @@
           <a:p>
             <a:fld id="{5BCAD085-E8A6-8845-BD4E-CB4CCA059FC4}" type="datetimeFigureOut">
               <a:rPr lang="en-US" smtClean="0"/>
-              <a:t>10/10/2026</a:t>
+              <a:t>10/11/2026</a:t>
             </a:fld>
             <a:endParaRPr lang="en-US"/>
           </a:p>
@@ -502,7 +502,7 @@
           <a:p>
             <a:fld id="{5BCAD085-E8A6-8845-BD4E-CB4CCA059FC4}" type="datetimeFigureOut">
               <a:rPr lang="en-US" smtClean="0"/>
-              <a:t>10/10/2026</a:t>
+              <a:t>10/11/2026</a:t>
             </a:fld>
             <a:endParaRPr lang="en-US"/>
           </a:p>
@@ -680,7 +680,7 @@
           <a:p>
             <a:fld id="{5BCAD085-E8A6-8845-BD4E-CB4CCA059FC4}" type="datetimeFigureOut">
               <a:rPr lang="en-US" smtClean="0"/>
-              <a:t>10/10/2026</a:t>
+              <a:t>10/11/2026</a:t>
             </a:fld>
             <a:endParaRPr lang="en-US"/>
           </a:p>
@@ -848,7 +848,7 @@
           <a:p>
             <a:fld id="{5BCAD085-E8A6-8845-BD4E-CB4CCA059FC4}" type="datetimeFigureOut">
               <a:rPr lang="en-US" smtClean="0"/>
-              <a:t>10/10/2026</a:t>
+              <a:t>10/11/2026</a:t>
             </a:fld>
             <a:endParaRPr lang="en-US"/>
           </a:p>
@@ -1093,7 +1093,7 @@
           <a:p>
             <a:fld id="{5BCAD085-E8A6-8845-BD4E-CB4CCA059FC4}" type="datetimeFigureOut">
               <a:rPr lang="en-US" smtClean="0"/>
-              <a:t>10/10/2026</a:t>
+              <a:t>10/11/2026</a:t>
             </a:fld>
             <a:endParaRPr lang="en-US"/>
           </a:p>
@@ -1378,7 +1378,7 @@
           <a:p>
             <a:fld id="{5BCAD085-E8A6-8845-BD4E-CB4CCA059FC4}" type="datetimeFigureOut">
               <a:rPr lang="en-US" smtClean="0"/>
-              <a:t>10/10/2026</a:t>
+              <a:t>10/11/2026</a:t>
             </a:fld>
             <a:endParaRPr lang="en-US"/>
           </a:p>
@@ -1797,7 +1797,7 @@
           <a:p>
             <a:fld id="{5BCAD085-E8A6-8845-BD4E-CB4CCA059FC4}" type="datetimeFigureOut">
               <a:rPr lang="en-US" smtClean="0"/>
-              <a:t>10/10/2026</a:t>
+              <a:t>10/11/2026</a:t>
             </a:fld>
             <a:endParaRPr lang="en-US"/>
           </a:p>
@@ -1914,7 +1914,7 @@
           <a:p>
             <a:fld id="{5BCAD085-E8A6-8845-BD4E-CB4CCA059FC4}" type="datetimeFigureOut">
               <a:rPr lang="en-US" smtClean="0"/>
-              <a:t>10/10/2026</a:t>
+              <a:t>10/11/2026</a:t>
             </a:fld>
             <a:endParaRPr lang="en-US"/>
           </a:p>
@@ -2009,7 +2009,7 @@
           <a:p>
             <a:fld id="{5BCAD085-E8A6-8845-BD4E-CB4CCA059FC4}" type="datetimeFigureOut">
               <a:rPr lang="en-US" smtClean="0"/>
-              <a:t>10/10/2026</a:t>
+              <a:t>10/11/2026</a:t>
             </a:fld>
             <a:endParaRPr lang="en-US"/>
           </a:p>
@@ -2284,7 +2284,7 @@
           <a:p>
             <a:fld id="{5BCAD085-E8A6-8845-BD4E-CB4CCA059FC4}" type="datetimeFigureOut">
               <a:rPr lang="en-US" smtClean="0"/>
-              <a:t>10/10/2026</a:t>
+              <a:t>10/11/2026</a:t>
             </a:fld>
             <a:endParaRPr lang="en-US"/>
           </a:p>
@@ -2536,7 +2536,7 @@
           <a:p>
             <a:fld id="{5BCAD085-E8A6-8845-BD4E-CB4CCA059FC4}" type="datetimeFigureOut">
               <a:rPr lang="en-US" smtClean="0"/>
-              <a:t>10/10/2026</a:t>
+              <a:t>10/11/2026</a:t>
             </a:fld>
             <a:endParaRPr lang="en-US"/>
           </a:p>
@@ -2747,7 +2747,7 @@
           <a:p>
             <a:fld id="{5BCAD085-E8A6-8845-BD4E-CB4CCA059FC4}" type="datetimeFigureOut">
               <a:rPr lang="en-US" smtClean="0"/>
-              <a:t>10/10/2026</a:t>
+              <a:t>10/11/2026</a:t>
             </a:fld>
             <a:endParaRPr lang="en-US"/>
           </a:p>
@@ -3450,6 +3450,7 @@
           <a:lstStyle/>
           <a:p>
             <a:pPr algn="ctr"/>
+            <a:endParaRPr/>
           </a:p>
         </p:txBody>
       </p:sp>
@@ -3461,7 +3462,7 @@
         </p:nvSpPr>
         <p:spPr>
           <a:xfrm>
-            <a:off x="292608" y="0"/>
+            <a:off x="292608" y="128016"/>
             <a:ext cx="11643360" cy="777240"/>
           </a:xfrm>
           <a:prstGeom prst="rect">
@@ -3470,21 +3471,117 @@
           <a:noFill/>
         </p:spPr>
         <p:txBody>
-          <a:bodyPr wrap="square" lIns="54864" rIns="54864" tIns="18288" bIns="18288">
+          <a:bodyPr wrap="square" lIns="54864" tIns="18288" rIns="54864" bIns="18288">
             <a:spAutoFit/>
           </a:bodyPr>
           <a:lstStyle/>
           <a:p>
             <a:pPr algn="l"/>
             <a:r>
-              <a:rPr sz="2500" b="1">
+              <a:rPr sz="2500" b="1" dirty="0" err="1">
                 <a:solidFill>
                   <a:srgbClr val="FFFFFF"/>
                 </a:solidFill>
                 <a:latin typeface="Arial"/>
               </a:rPr>
-              <a:t>Tầng A · surrogate g_θ — một hàm, hai pha</a:t>
-            </a:r>
+              <a:t>Tầng</a:t>
+            </a:r>
+            <a:r>
+              <a:rPr sz="2500" b="1" dirty="0">
+                <a:solidFill>
+                  <a:srgbClr val="FFFFFF"/>
+                </a:solidFill>
+                <a:latin typeface="Arial"/>
+              </a:rPr>
+              <a:t> A · surrogate </a:t>
+            </a:r>
+            <a:r>
+              <a:rPr sz="2500" b="1" dirty="0" err="1">
+                <a:solidFill>
+                  <a:srgbClr val="FFFFFF"/>
+                </a:solidFill>
+                <a:latin typeface="Arial"/>
+              </a:rPr>
+              <a:t>g_θ</a:t>
+            </a:r>
+            <a:r>
+              <a:rPr sz="2500" b="1" dirty="0">
+                <a:solidFill>
+                  <a:srgbClr val="FFFFFF"/>
+                </a:solidFill>
+                <a:latin typeface="Arial"/>
+              </a:rPr>
+              <a:t> — </a:t>
+            </a:r>
+            <a:r>
+              <a:rPr sz="2500" b="1" dirty="0" err="1">
+                <a:solidFill>
+                  <a:srgbClr val="FFFFFF"/>
+                </a:solidFill>
+                <a:latin typeface="Arial"/>
+              </a:rPr>
+              <a:t>một</a:t>
+            </a:r>
+            <a:r>
+              <a:rPr sz="2500" b="1" dirty="0">
+                <a:solidFill>
+                  <a:srgbClr val="FFFFFF"/>
+                </a:solidFill>
+                <a:latin typeface="Arial"/>
+              </a:rPr>
+              <a:t> </a:t>
+            </a:r>
+            <a:r>
+              <a:rPr sz="2500" b="1" dirty="0" err="1">
+                <a:solidFill>
+                  <a:srgbClr val="FFFFFF"/>
+                </a:solidFill>
+                <a:latin typeface="Arial"/>
+              </a:rPr>
+              <a:t>hàm</a:t>
+            </a:r>
+            <a:r>
+              <a:rPr sz="2500" b="1" dirty="0">
+                <a:solidFill>
+                  <a:srgbClr val="FFFFFF"/>
+                </a:solidFill>
+                <a:latin typeface="Arial"/>
+              </a:rPr>
+              <a:t>, </a:t>
+            </a:r>
+            <a:r>
+              <a:rPr sz="2500" b="1" dirty="0" err="1">
+                <a:solidFill>
+                  <a:srgbClr val="FFFFFF"/>
+                </a:solidFill>
+                <a:latin typeface="Arial"/>
+              </a:rPr>
+              <a:t>hai</a:t>
+            </a:r>
+            <a:r>
+              <a:rPr sz="2500" b="1" dirty="0">
+                <a:solidFill>
+                  <a:srgbClr val="FFFFFF"/>
+                </a:solidFill>
+                <a:latin typeface="Arial"/>
+              </a:rPr>
+              <a:t> </a:t>
+            </a:r>
+            <a:r>
+              <a:rPr sz="2500" b="1" dirty="0" err="1">
+                <a:solidFill>
+                  <a:srgbClr val="FFFFFF"/>
+                </a:solidFill>
+                <a:latin typeface="Arial"/>
+              </a:rPr>
+              <a:t>pha</a:t>
+            </a:r>
+            <a:endParaRPr sz="2500" b="1" dirty="0">
+              <a:solidFill>
+                <a:srgbClr val="FFFFFF"/>
+              </a:solidFill>
+              <a:latin typeface="Arial"/>
+            </a:endParaRPr>
           </a:p>
         </p:txBody>
       </p:sp>
@@ -3529,6 +3626,7 @@
           <a:lstStyle/>
           <a:p>
             <a:pPr algn="ctr"/>
+            <a:endParaRPr/>
           </a:p>
         </p:txBody>
       </p:sp>
@@ -3549,7 +3647,7 @@
           <a:noFill/>
         </p:spPr>
         <p:txBody>
-          <a:bodyPr wrap="square" lIns="54864" rIns="54864" tIns="18288" bIns="18288">
+          <a:bodyPr wrap="square" lIns="54864" tIns="18288" rIns="54864" bIns="18288">
             <a:spAutoFit/>
           </a:bodyPr>
           <a:lstStyle/>
@@ -3584,7 +3682,7 @@
           <a:noFill/>
         </p:spPr>
         <p:txBody>
-          <a:bodyPr wrap="square" lIns="54864" rIns="54864" tIns="18288" bIns="18288">
+          <a:bodyPr wrap="square" lIns="54864" tIns="18288" rIns="54864" bIns="18288">
             <a:spAutoFit/>
           </a:bodyPr>
           <a:lstStyle/>
@@ -3645,6 +3743,7 @@
           <a:lstStyle/>
           <a:p>
             <a:pPr algn="ctr"/>
+            <a:endParaRPr/>
           </a:p>
         </p:txBody>
       </p:sp>
@@ -3691,6 +3790,7 @@
           <a:lstStyle/>
           <a:p>
             <a:pPr algn="ctr"/>
+            <a:endParaRPr/>
           </a:p>
         </p:txBody>
       </p:sp>
@@ -3735,6 +3835,7 @@
           <a:lstStyle/>
           <a:p>
             <a:pPr algn="ctr"/>
+            <a:endParaRPr/>
           </a:p>
         </p:txBody>
       </p:sp>
@@ -3755,7 +3856,7 @@
           <a:noFill/>
         </p:spPr>
         <p:txBody>
-          <a:bodyPr wrap="square" lIns="54864" rIns="54864" tIns="18288" bIns="18288">
+          <a:bodyPr wrap="square" lIns="54864" tIns="18288" rIns="54864" bIns="18288">
             <a:spAutoFit/>
           </a:bodyPr>
           <a:lstStyle/>
@@ -3790,7 +3891,7 @@
           <a:noFill/>
         </p:spPr>
         <p:txBody>
-          <a:bodyPr wrap="square" lIns="54864" rIns="54864" tIns="18288" bIns="18288">
+          <a:bodyPr wrap="square" lIns="54864" tIns="18288" rIns="54864" bIns="18288">
             <a:spAutoFit/>
           </a:bodyPr>
           <a:lstStyle/>
@@ -3923,6 +4024,7 @@
           <a:lstStyle/>
           <a:p>
             <a:pPr algn="ctr"/>
+            <a:endParaRPr/>
           </a:p>
         </p:txBody>
       </p:sp>
@@ -3969,6 +4071,7 @@
           <a:lstStyle/>
           <a:p>
             <a:pPr algn="ctr"/>
+            <a:endParaRPr/>
           </a:p>
         </p:txBody>
       </p:sp>
@@ -4013,148 +4116,7 @@
           <a:lstStyle/>
           <a:p>
             <a:pPr algn="ctr"/>
-          </a:p>
-        </p:txBody>
-      </p:sp>
-      <p:sp>
-        <p:nvSpPr>
-          <p:cNvPr id="15" name="TextBox 14"/>
-          <p:cNvSpPr txBox="1"/>
-          <p:nvPr/>
-        </p:nvSpPr>
-        <p:spPr>
-          <a:xfrm>
-            <a:off x="6236208" y="932688"/>
-            <a:ext cx="5257800" cy="292608"/>
-          </a:xfrm>
-          <a:prstGeom prst="rect">
-            <a:avLst/>
-          </a:prstGeom>
-          <a:noFill/>
-        </p:spPr>
-        <p:txBody>
-          <a:bodyPr wrap="square" lIns="54864" rIns="54864" tIns="18288" bIns="18288">
-            <a:spAutoFit/>
-          </a:bodyPr>
-          <a:lstStyle/>
-          <a:p>
-            <a:pPr algn="l"/>
-            <a:r>
-              <a:rPr sz="1500" b="1">
-                <a:solidFill>
-                  <a:srgbClr val="FFFFFF"/>
-                </a:solidFill>
-                <a:latin typeface="Arial"/>
-              </a:rPr>
-              <a:t>Dữ liệu — log của chính các lượt gọi v</a:t>
-            </a:r>
-          </a:p>
-        </p:txBody>
-      </p:sp>
-      <p:sp>
-        <p:nvSpPr>
-          <p:cNvPr id="16" name="TextBox 15"/>
-          <p:cNvSpPr txBox="1"/>
-          <p:nvPr/>
-        </p:nvSpPr>
-        <p:spPr>
-          <a:xfrm>
-            <a:off x="6309360" y="1298448"/>
-            <a:ext cx="5111496" cy="1505468"/>
-          </a:xfrm>
-          <a:prstGeom prst="rect">
-            <a:avLst/>
-          </a:prstGeom>
-          <a:noFill/>
-        </p:spPr>
-        <p:txBody>
-          <a:bodyPr wrap="square" lIns="54864" rIns="54864" tIns="18288" bIns="18288">
-            <a:spAutoFit/>
-          </a:bodyPr>
-          <a:lstStyle/>
-          <a:p>
-            <a:pPr algn="l"/>
-            <a:r>
-              <a:rPr sz="1200" b="0">
-                <a:solidFill>
-                  <a:srgbClr val="333333"/>
-                </a:solidFill>
-                <a:latin typeface="Consolas"/>
-              </a:rPr>
-              <a:t>pha 1, bốn vòng      10.000 × 111 = 1.200.000</a:t>
-            </a:r>
-          </a:p>
-          <a:p>
-            <a:pPr algn="l"/>
-            <a:r>
-              <a:rPr sz="1200" b="0">
-                <a:solidFill>
-                  <a:srgbClr val="333333"/>
-                </a:solidFill>
-                <a:latin typeface="Consolas"/>
-              </a:rPr>
-              <a:t>verification pha 2  150.000 ×   7 = 1.050.000</a:t>
-            </a:r>
-          </a:p>
-          <a:p>
-            <a:pPr algn="l"/>
-            <a:r>
-              <a:rPr sz="1200" b="0">
-                <a:solidFill>
-                  <a:srgbClr val="333333"/>
-                </a:solidFill>
-                <a:latin typeface="Consolas"/>
-              </a:rPr>
-              <a:t>leo thang            20.000 × 111 = 2.220.000</a:t>
-            </a:r>
-          </a:p>
-          <a:p>
-            <a:pPr algn="l"/>
-            <a:r>
-              <a:rPr sz="1200" b="0">
-                <a:solidFill>
-                  <a:srgbClr val="333333"/>
-                </a:solidFill>
-                <a:latin typeface="Consolas"/>
-              </a:rPr>
-              <a:t>thoát sớm            20.000 ×   2 =    40.000</a:t>
-            </a:r>
-          </a:p>
-          <a:p>
-            <a:pPr algn="l"/>
-            <a:r>
-              <a:rPr sz="1200" b="0">
-                <a:solidFill>
-                  <a:srgbClr val="333333"/>
-                </a:solidFill>
-                <a:latin typeface="Consolas"/>
-              </a:rPr>
-              <a:t>                                   ───────────</a:t>
-            </a:r>
-          </a:p>
-          <a:p>
-            <a:pPr algn="l"/>
-            <a:r>
-              <a:rPr sz="1200" b="0">
-                <a:solidFill>
-                  <a:srgbClr val="333333"/>
-                </a:solidFill>
-                <a:latin typeface="Consolas"/>
-              </a:rPr>
-              <a:t>                                     4.510.000</a:t>
-            </a:r>
-          </a:p>
-          <a:p>
-            <a:pPr algn="l"/>
-            <a:r>
-              <a:rPr sz="1200" b="0">
-                <a:solidFill>
-                  <a:srgbClr val="333333"/>
-                </a:solidFill>
-                <a:latin typeface="Consolas"/>
-              </a:rPr>
-              <a:t>|S| từ 0 tới 40 — nên MỘT mô hình, không phải hai</a:t>
-            </a:r>
+            <a:endParaRPr/>
           </a:p>
         </p:txBody>
       </p:sp>
@@ -4201,6 +4163,7 @@
           <a:lstStyle/>
           <a:p>
             <a:pPr algn="ctr"/>
+            <a:endParaRPr/>
           </a:p>
         </p:txBody>
       </p:sp>
@@ -4247,6 +4210,7 @@
           <a:lstStyle/>
           <a:p>
             <a:pPr algn="ctr"/>
+            <a:endParaRPr/>
           </a:p>
         </p:txBody>
       </p:sp>
@@ -4291,6 +4255,7 @@
           <a:lstStyle/>
           <a:p>
             <a:pPr algn="ctr"/>
+            <a:endParaRPr/>
           </a:p>
         </p:txBody>
       </p:sp>
@@ -4311,7 +4276,7 @@
           <a:noFill/>
         </p:spPr>
         <p:txBody>
-          <a:bodyPr wrap="square" lIns="54864" rIns="54864" tIns="18288" bIns="18288">
+          <a:bodyPr wrap="square" lIns="54864" tIns="18288" rIns="54864" bIns="18288">
             <a:spAutoFit/>
           </a:bodyPr>
           <a:lstStyle/>
@@ -4346,7 +4311,7 @@
           <a:noFill/>
         </p:spPr>
         <p:txBody>
-          <a:bodyPr wrap="square" lIns="54864" rIns="54864" tIns="18288" bIns="18288">
+          <a:bodyPr wrap="square" lIns="54864" tIns="18288" rIns="54864" bIns="18288">
             <a:spAutoFit/>
           </a:bodyPr>
           <a:lstStyle/>
@@ -4388,15 +4353,12 @@
           </a:p>
           <a:p>
             <a:pPr algn="l"/>
-            <a:r>
-              <a:rPr sz="1200" b="0">
-                <a:solidFill>
-                  <a:srgbClr val="333333"/>
-                </a:solidFill>
-                <a:latin typeface="Consolas"/>
-              </a:rPr>
-              <a:t/>
-            </a:r>
+            <a:endParaRPr sz="1200" b="0">
+              <a:solidFill>
+                <a:srgbClr val="333333"/>
+              </a:solidFill>
+              <a:latin typeface="Consolas"/>
+            </a:endParaRPr>
           </a:p>
           <a:p>
             <a:pPr algn="l"/>
@@ -4479,6 +4441,7 @@
           <a:lstStyle/>
           <a:p>
             <a:pPr algn="ctr"/>
+            <a:endParaRPr/>
           </a:p>
         </p:txBody>
       </p:sp>
@@ -4525,6 +4488,7 @@
           <a:lstStyle/>
           <a:p>
             <a:pPr algn="ctr"/>
+            <a:endParaRPr/>
           </a:p>
         </p:txBody>
       </p:sp>
@@ -4569,6 +4533,7 @@
           <a:lstStyle/>
           <a:p>
             <a:pPr algn="ctr"/>
+            <a:endParaRPr/>
           </a:p>
         </p:txBody>
       </p:sp>
@@ -4589,7 +4554,7 @@
           <a:noFill/>
         </p:spPr>
         <p:txBody>
-          <a:bodyPr wrap="square" lIns="54864" rIns="54864" tIns="18288" bIns="18288">
+          <a:bodyPr wrap="square" lIns="54864" tIns="18288" rIns="54864" bIns="18288">
             <a:spAutoFit/>
           </a:bodyPr>
           <a:lstStyle/>
@@ -4624,92 +4589,812 @@
           <a:noFill/>
         </p:spPr>
         <p:txBody>
-          <a:bodyPr wrap="square" lIns="54864" rIns="54864" tIns="18288" bIns="18288">
+          <a:bodyPr wrap="square" lIns="54864" tIns="18288" rIns="54864" bIns="18288">
             <a:spAutoFit/>
           </a:bodyPr>
           <a:lstStyle/>
           <a:p>
             <a:pPr algn="l"/>
             <a:r>
-              <a:rPr sz="1200" b="0">
+              <a:rPr sz="1200" b="0" dirty="0">
                 <a:solidFill>
                   <a:srgbClr val="333333"/>
                 </a:solidFill>
                 <a:latin typeface="Consolas"/>
               </a:rPr>
-              <a:t>AUC TRONG từng truy vấn, rồi trung bình</a:t>
-            </a:r>
+              <a:t>AUC TRONG </a:t>
+            </a:r>
+            <a:r>
+              <a:rPr sz="1200" b="0" dirty="0" err="1">
+                <a:solidFill>
+                  <a:srgbClr val="333333"/>
+                </a:solidFill>
+                <a:latin typeface="Consolas"/>
+              </a:rPr>
+              <a:t>từng</a:t>
+            </a:r>
+            <a:r>
+              <a:rPr sz="1200" b="0" dirty="0">
+                <a:solidFill>
+                  <a:srgbClr val="333333"/>
+                </a:solidFill>
+                <a:latin typeface="Consolas"/>
+              </a:rPr>
+              <a:t> </a:t>
+            </a:r>
+            <a:r>
+              <a:rPr sz="1200" b="0" dirty="0" err="1">
+                <a:solidFill>
+                  <a:srgbClr val="333333"/>
+                </a:solidFill>
+                <a:latin typeface="Consolas"/>
+              </a:rPr>
+              <a:t>truy</a:t>
+            </a:r>
+            <a:r>
+              <a:rPr sz="1200" b="0" dirty="0">
+                <a:solidFill>
+                  <a:srgbClr val="333333"/>
+                </a:solidFill>
+                <a:latin typeface="Consolas"/>
+              </a:rPr>
+              <a:t> </a:t>
+            </a:r>
+            <a:r>
+              <a:rPr sz="1200" b="0" dirty="0" err="1">
+                <a:solidFill>
+                  <a:srgbClr val="333333"/>
+                </a:solidFill>
+                <a:latin typeface="Consolas"/>
+              </a:rPr>
+              <a:t>vấn</a:t>
+            </a:r>
+            <a:r>
+              <a:rPr sz="1200" b="0" dirty="0">
+                <a:solidFill>
+                  <a:srgbClr val="333333"/>
+                </a:solidFill>
+                <a:latin typeface="Consolas"/>
+              </a:rPr>
+              <a:t>, </a:t>
+            </a:r>
+            <a:r>
+              <a:rPr sz="1200" b="0" dirty="0" err="1">
+                <a:solidFill>
+                  <a:srgbClr val="333333"/>
+                </a:solidFill>
+                <a:latin typeface="Consolas"/>
+              </a:rPr>
+              <a:t>rồi</a:t>
+            </a:r>
+            <a:r>
+              <a:rPr sz="1200" b="0" dirty="0">
+                <a:solidFill>
+                  <a:srgbClr val="333333"/>
+                </a:solidFill>
+                <a:latin typeface="Consolas"/>
+              </a:rPr>
+              <a:t> </a:t>
+            </a:r>
+            <a:r>
+              <a:rPr sz="1200" b="0" dirty="0" err="1">
+                <a:solidFill>
+                  <a:srgbClr val="333333"/>
+                </a:solidFill>
+                <a:latin typeface="Consolas"/>
+              </a:rPr>
+              <a:t>trung</a:t>
+            </a:r>
+            <a:r>
+              <a:rPr sz="1200" b="0" dirty="0">
+                <a:solidFill>
+                  <a:srgbClr val="333333"/>
+                </a:solidFill>
+                <a:latin typeface="Consolas"/>
+              </a:rPr>
+              <a:t> </a:t>
+            </a:r>
+            <a:r>
+              <a:rPr sz="1200" b="0" dirty="0" err="1">
+                <a:solidFill>
+                  <a:srgbClr val="333333"/>
+                </a:solidFill>
+                <a:latin typeface="Consolas"/>
+              </a:rPr>
+              <a:t>bình</a:t>
+            </a:r>
+            <a:endParaRPr sz="1200" b="0" dirty="0">
+              <a:solidFill>
+                <a:srgbClr val="333333"/>
+              </a:solidFill>
+              <a:latin typeface="Consolas"/>
+            </a:endParaRPr>
           </a:p>
           <a:p>
             <a:pPr algn="l"/>
             <a:r>
-              <a:rPr sz="1200" b="0">
+              <a:rPr sz="1200" b="0" dirty="0" err="1">
                 <a:solidFill>
                   <a:srgbClr val="333333"/>
                 </a:solidFill>
                 <a:latin typeface="Consolas"/>
               </a:rPr>
-              <a:t>sàn:  mô hình chỉ nhìn |S|</a:t>
+              <a:t>sàn</a:t>
+            </a:r>
+            <a:r>
+              <a:rPr sz="1200" b="0" dirty="0">
+                <a:solidFill>
+                  <a:srgbClr val="333333"/>
+                </a:solidFill>
+                <a:latin typeface="Consolas"/>
+              </a:rPr>
+              <a:t>:  </a:t>
+            </a:r>
+            <a:r>
+              <a:rPr sz="1200" b="0" dirty="0" err="1">
+                <a:solidFill>
+                  <a:srgbClr val="333333"/>
+                </a:solidFill>
+                <a:latin typeface="Consolas"/>
+              </a:rPr>
+              <a:t>mô</a:t>
+            </a:r>
+            <a:r>
+              <a:rPr sz="1200" b="0" dirty="0">
+                <a:solidFill>
+                  <a:srgbClr val="333333"/>
+                </a:solidFill>
+                <a:latin typeface="Consolas"/>
+              </a:rPr>
+              <a:t> </a:t>
+            </a:r>
+            <a:r>
+              <a:rPr sz="1200" b="0" dirty="0" err="1">
+                <a:solidFill>
+                  <a:srgbClr val="333333"/>
+                </a:solidFill>
+                <a:latin typeface="Consolas"/>
+              </a:rPr>
+              <a:t>hình</a:t>
+            </a:r>
+            <a:r>
+              <a:rPr sz="1200" b="0" dirty="0">
+                <a:solidFill>
+                  <a:srgbClr val="333333"/>
+                </a:solidFill>
+                <a:latin typeface="Consolas"/>
+              </a:rPr>
+              <a:t> </a:t>
+            </a:r>
+            <a:r>
+              <a:rPr sz="1200" b="0" dirty="0" err="1">
+                <a:solidFill>
+                  <a:srgbClr val="333333"/>
+                </a:solidFill>
+                <a:latin typeface="Consolas"/>
+              </a:rPr>
+              <a:t>chỉ</a:t>
+            </a:r>
+            <a:r>
+              <a:rPr sz="1200" b="0" dirty="0">
+                <a:solidFill>
+                  <a:srgbClr val="333333"/>
+                </a:solidFill>
+                <a:latin typeface="Consolas"/>
+              </a:rPr>
+              <a:t> </a:t>
+            </a:r>
+            <a:r>
+              <a:rPr sz="1200" b="0" dirty="0" err="1">
+                <a:solidFill>
+                  <a:srgbClr val="333333"/>
+                </a:solidFill>
+                <a:latin typeface="Consolas"/>
+              </a:rPr>
+              <a:t>nhìn</a:t>
+            </a:r>
+            <a:r>
+              <a:rPr sz="1200" b="0" dirty="0">
+                <a:solidFill>
+                  <a:srgbClr val="333333"/>
+                </a:solidFill>
+                <a:latin typeface="Consolas"/>
+              </a:rPr>
+              <a:t> |S|</a:t>
             </a:r>
           </a:p>
           <a:p>
             <a:pPr algn="l"/>
-            <a:r>
-              <a:rPr sz="1200" b="0">
+            <a:endParaRPr sz="1200" b="0" dirty="0">
+              <a:solidFill>
+                <a:srgbClr val="333333"/>
+              </a:solidFill>
+              <a:latin typeface="Consolas"/>
+            </a:endParaRPr>
+          </a:p>
+          <a:p>
+            <a:pPr algn="l"/>
+            <a:r>
+              <a:rPr sz="1200" b="0" dirty="0">
                 <a:solidFill>
                   <a:srgbClr val="333333"/>
                 </a:solidFill>
                 <a:latin typeface="Consolas"/>
               </a:rPr>
-              <a:t/>
-            </a:r>
+              <a:t>AUC </a:t>
+            </a:r>
+            <a:r>
+              <a:rPr sz="1200" b="0" dirty="0" err="1">
+                <a:solidFill>
+                  <a:srgbClr val="333333"/>
+                </a:solidFill>
+                <a:latin typeface="Consolas"/>
+              </a:rPr>
+              <a:t>gộp</a:t>
+            </a:r>
+            <a:r>
+              <a:rPr sz="1200" b="0" dirty="0">
+                <a:solidFill>
+                  <a:srgbClr val="333333"/>
+                </a:solidFill>
+                <a:latin typeface="Consolas"/>
+              </a:rPr>
+              <a:t> </a:t>
+            </a:r>
+            <a:r>
+              <a:rPr sz="1200" b="0" dirty="0" err="1">
+                <a:solidFill>
+                  <a:srgbClr val="333333"/>
+                </a:solidFill>
+                <a:latin typeface="Consolas"/>
+              </a:rPr>
+              <a:t>là</a:t>
+            </a:r>
+            <a:r>
+              <a:rPr sz="1200" b="0" dirty="0">
+                <a:solidFill>
+                  <a:srgbClr val="333333"/>
+                </a:solidFill>
+                <a:latin typeface="Consolas"/>
+              </a:rPr>
+              <a:t> </a:t>
+            </a:r>
+            <a:r>
+              <a:rPr sz="1200" b="0" dirty="0" err="1">
+                <a:solidFill>
+                  <a:srgbClr val="333333"/>
+                </a:solidFill>
+                <a:latin typeface="Consolas"/>
+              </a:rPr>
+              <a:t>bẫy</a:t>
+            </a:r>
+            <a:r>
+              <a:rPr sz="1200" b="0" dirty="0">
+                <a:solidFill>
+                  <a:srgbClr val="333333"/>
+                </a:solidFill>
+                <a:latin typeface="Consolas"/>
+              </a:rPr>
+              <a:t> — </a:t>
+            </a:r>
+            <a:r>
+              <a:rPr sz="1200" b="0" dirty="0" err="1">
+                <a:solidFill>
+                  <a:srgbClr val="333333"/>
+                </a:solidFill>
+                <a:latin typeface="Consolas"/>
+              </a:rPr>
+              <a:t>tập</a:t>
+            </a:r>
+            <a:r>
+              <a:rPr sz="1200" b="0" dirty="0">
+                <a:solidFill>
+                  <a:srgbClr val="333333"/>
+                </a:solidFill>
+                <a:latin typeface="Consolas"/>
+              </a:rPr>
+              <a:t> </a:t>
+            </a:r>
+            <a:r>
+              <a:rPr sz="1200" b="0" dirty="0" err="1">
+                <a:solidFill>
+                  <a:srgbClr val="333333"/>
+                </a:solidFill>
+                <a:latin typeface="Consolas"/>
+              </a:rPr>
+              <a:t>lớn</a:t>
+            </a:r>
+            <a:r>
+              <a:rPr sz="1200" b="0" dirty="0">
+                <a:solidFill>
+                  <a:srgbClr val="333333"/>
+                </a:solidFill>
+                <a:latin typeface="Consolas"/>
+              </a:rPr>
+              <a:t> </a:t>
+            </a:r>
+            <a:r>
+              <a:rPr sz="1200" b="0" dirty="0" err="1">
+                <a:solidFill>
+                  <a:srgbClr val="333333"/>
+                </a:solidFill>
+                <a:latin typeface="Consolas"/>
+              </a:rPr>
+              <a:t>thì</a:t>
+            </a:r>
+            <a:r>
+              <a:rPr sz="1200" b="0" dirty="0">
+                <a:solidFill>
+                  <a:srgbClr val="333333"/>
+                </a:solidFill>
+                <a:latin typeface="Consolas"/>
+              </a:rPr>
+              <a:t> v </a:t>
+            </a:r>
+            <a:r>
+              <a:rPr sz="1200" b="0" dirty="0" err="1">
+                <a:solidFill>
+                  <a:srgbClr val="333333"/>
+                </a:solidFill>
+                <a:latin typeface="Consolas"/>
+              </a:rPr>
+              <a:t>cao</a:t>
+            </a:r>
+            <a:r>
+              <a:rPr sz="1200" b="0" dirty="0">
+                <a:solidFill>
+                  <a:srgbClr val="333333"/>
+                </a:solidFill>
+                <a:latin typeface="Consolas"/>
+              </a:rPr>
+              <a:t> </a:t>
+            </a:r>
+            <a:r>
+              <a:rPr sz="1200" b="0" dirty="0" err="1">
+                <a:solidFill>
+                  <a:srgbClr val="333333"/>
+                </a:solidFill>
+                <a:latin typeface="Consolas"/>
+              </a:rPr>
+              <a:t>nên</a:t>
+            </a:r>
+            <a:r>
+              <a:rPr sz="1200" b="0" dirty="0">
+                <a:solidFill>
+                  <a:srgbClr val="333333"/>
+                </a:solidFill>
+                <a:latin typeface="Consolas"/>
+              </a:rPr>
+              <a:t> </a:t>
+            </a:r>
+            <a:r>
+              <a:rPr sz="1200" b="0" dirty="0" err="1">
+                <a:solidFill>
+                  <a:srgbClr val="333333"/>
+                </a:solidFill>
+                <a:latin typeface="Consolas"/>
+              </a:rPr>
+              <a:t>số</a:t>
+            </a:r>
+            <a:r>
+              <a:rPr sz="1200" b="0" dirty="0">
+                <a:solidFill>
+                  <a:srgbClr val="333333"/>
+                </a:solidFill>
+                <a:latin typeface="Consolas"/>
+              </a:rPr>
+              <a:t> </a:t>
+            </a:r>
+            <a:r>
+              <a:rPr sz="1200" b="0" dirty="0" err="1">
+                <a:solidFill>
+                  <a:srgbClr val="333333"/>
+                </a:solidFill>
+                <a:latin typeface="Consolas"/>
+              </a:rPr>
+              <a:t>đẹp</a:t>
+            </a:r>
+            <a:endParaRPr sz="1200" b="0" dirty="0">
+              <a:solidFill>
+                <a:srgbClr val="333333"/>
+              </a:solidFill>
+              <a:latin typeface="Consolas"/>
+            </a:endParaRPr>
           </a:p>
           <a:p>
             <a:pPr algn="l"/>
             <a:r>
-              <a:rPr sz="1200" b="0">
+              <a:rPr sz="1200" b="0" dirty="0" err="1">
                 <a:solidFill>
                   <a:srgbClr val="333333"/>
                 </a:solidFill>
                 <a:latin typeface="Consolas"/>
               </a:rPr>
-              <a:t>AUC gộp là bẫy — tập lớn thì v cao nên số đẹp</a:t>
+              <a:t>sẵn</a:t>
+            </a:r>
+            <a:r>
+              <a:rPr sz="1200" b="0" dirty="0">
+                <a:solidFill>
+                  <a:srgbClr val="333333"/>
+                </a:solidFill>
+                <a:latin typeface="Consolas"/>
+              </a:rPr>
+              <a:t>, </a:t>
+            </a:r>
+            <a:r>
+              <a:rPr sz="1200" b="0" dirty="0" err="1">
+                <a:solidFill>
+                  <a:srgbClr val="333333"/>
+                </a:solidFill>
+                <a:latin typeface="Consolas"/>
+              </a:rPr>
+              <a:t>mà</a:t>
+            </a:r>
+            <a:r>
+              <a:rPr sz="1200" b="0" dirty="0">
+                <a:solidFill>
+                  <a:srgbClr val="333333"/>
+                </a:solidFill>
+                <a:latin typeface="Consolas"/>
+              </a:rPr>
+              <a:t> </a:t>
+            </a:r>
+            <a:r>
+              <a:rPr sz="1200" b="0" dirty="0" err="1">
+                <a:solidFill>
+                  <a:srgbClr val="333333"/>
+                </a:solidFill>
+                <a:latin typeface="Consolas"/>
+              </a:rPr>
+              <a:t>phân</a:t>
+            </a:r>
+            <a:r>
+              <a:rPr sz="1200" b="0" dirty="0">
+                <a:solidFill>
+                  <a:srgbClr val="333333"/>
+                </a:solidFill>
+                <a:latin typeface="Consolas"/>
+              </a:rPr>
+              <a:t> </a:t>
+            </a:r>
+            <a:r>
+              <a:rPr sz="1200" b="0" dirty="0" err="1">
+                <a:solidFill>
+                  <a:srgbClr val="333333"/>
+                </a:solidFill>
+                <a:latin typeface="Consolas"/>
+              </a:rPr>
+              <a:t>biệt</a:t>
+            </a:r>
+            <a:r>
+              <a:rPr sz="1200" b="0" dirty="0">
+                <a:solidFill>
+                  <a:srgbClr val="333333"/>
+                </a:solidFill>
+                <a:latin typeface="Consolas"/>
+              </a:rPr>
+              <a:t> </a:t>
+            </a:r>
+            <a:r>
+              <a:rPr sz="1200" b="0" dirty="0" err="1">
+                <a:solidFill>
+                  <a:srgbClr val="333333"/>
+                </a:solidFill>
+                <a:latin typeface="Consolas"/>
+              </a:rPr>
+              <a:t>trong</a:t>
+            </a:r>
+            <a:r>
+              <a:rPr sz="1200" b="0" dirty="0">
+                <a:solidFill>
+                  <a:srgbClr val="333333"/>
+                </a:solidFill>
+                <a:latin typeface="Consolas"/>
+              </a:rPr>
+              <a:t> </a:t>
+            </a:r>
+            <a:r>
+              <a:rPr sz="1200" b="0" dirty="0" err="1">
+                <a:solidFill>
+                  <a:srgbClr val="333333"/>
+                </a:solidFill>
+                <a:latin typeface="Consolas"/>
+              </a:rPr>
+              <a:t>truy</a:t>
+            </a:r>
+            <a:r>
+              <a:rPr sz="1200" b="0" dirty="0">
+                <a:solidFill>
+                  <a:srgbClr val="333333"/>
+                </a:solidFill>
+                <a:latin typeface="Consolas"/>
+              </a:rPr>
+              <a:t> </a:t>
+            </a:r>
+            <a:r>
+              <a:rPr sz="1200" b="0" dirty="0" err="1">
+                <a:solidFill>
+                  <a:srgbClr val="333333"/>
+                </a:solidFill>
+                <a:latin typeface="Consolas"/>
+              </a:rPr>
+              <a:t>vấn</a:t>
+            </a:r>
+            <a:r>
+              <a:rPr sz="1200" b="0" dirty="0">
+                <a:solidFill>
+                  <a:srgbClr val="333333"/>
+                </a:solidFill>
+                <a:latin typeface="Consolas"/>
+              </a:rPr>
+              <a:t> </a:t>
+            </a:r>
+            <a:r>
+              <a:rPr sz="1200" b="0" dirty="0" err="1">
+                <a:solidFill>
+                  <a:srgbClr val="333333"/>
+                </a:solidFill>
+                <a:latin typeface="Consolas"/>
+              </a:rPr>
+              <a:t>bằng</a:t>
+            </a:r>
+            <a:r>
+              <a:rPr sz="1200" b="0" dirty="0">
+                <a:solidFill>
+                  <a:srgbClr val="333333"/>
+                </a:solidFill>
+                <a:latin typeface="Consolas"/>
+              </a:rPr>
+              <a:t> 0.</a:t>
             </a:r>
           </a:p>
           <a:p>
             <a:pPr algn="l"/>
             <a:r>
-              <a:rPr sz="1200" b="0">
+              <a:rPr sz="1200" b="0" dirty="0" err="1">
                 <a:solidFill>
                   <a:srgbClr val="333333"/>
                 </a:solidFill>
                 <a:latin typeface="Consolas"/>
               </a:rPr>
-              <a:t>sẵn, mà phân biệt trong truy vấn bằng 0.</a:t>
+              <a:t>Mốc</a:t>
+            </a:r>
+            <a:r>
+              <a:rPr sz="1200" b="0" dirty="0">
+                <a:solidFill>
+                  <a:srgbClr val="333333"/>
+                </a:solidFill>
+                <a:latin typeface="Consolas"/>
+              </a:rPr>
+              <a:t> </a:t>
+            </a:r>
+            <a:r>
+              <a:rPr sz="1200" b="0" dirty="0" err="1">
+                <a:solidFill>
+                  <a:srgbClr val="333333"/>
+                </a:solidFill>
+                <a:latin typeface="Consolas"/>
+              </a:rPr>
+              <a:t>kiến</a:t>
+            </a:r>
+            <a:r>
+              <a:rPr sz="1200" b="0" dirty="0">
+                <a:solidFill>
+                  <a:srgbClr val="333333"/>
+                </a:solidFill>
+                <a:latin typeface="Consolas"/>
+              </a:rPr>
+              <a:t> </a:t>
+            </a:r>
+            <a:r>
+              <a:rPr sz="1200" b="0" dirty="0" err="1">
+                <a:solidFill>
+                  <a:srgbClr val="333333"/>
+                </a:solidFill>
+                <a:latin typeface="Consolas"/>
+              </a:rPr>
+              <a:t>trúc</a:t>
+            </a:r>
+            <a:r>
+              <a:rPr sz="1200" b="0" dirty="0">
+                <a:solidFill>
+                  <a:srgbClr val="333333"/>
+                </a:solidFill>
+                <a:latin typeface="Consolas"/>
+              </a:rPr>
+              <a:t>: GBM </a:t>
+            </a:r>
+            <a:r>
+              <a:rPr sz="1200" b="0" dirty="0" err="1">
+                <a:solidFill>
+                  <a:srgbClr val="333333"/>
+                </a:solidFill>
+                <a:latin typeface="Consolas"/>
+              </a:rPr>
+              <a:t>đặc</a:t>
+            </a:r>
+            <a:r>
+              <a:rPr sz="1200" b="0" dirty="0">
+                <a:solidFill>
+                  <a:srgbClr val="333333"/>
+                </a:solidFill>
+                <a:latin typeface="Consolas"/>
+              </a:rPr>
+              <a:t> </a:t>
+            </a:r>
+            <a:r>
+              <a:rPr sz="1200" b="0" dirty="0" err="1">
+                <a:solidFill>
+                  <a:srgbClr val="333333"/>
+                </a:solidFill>
+                <a:latin typeface="Consolas"/>
+              </a:rPr>
+              <a:t>trưng</a:t>
+            </a:r>
+            <a:r>
+              <a:rPr sz="1200" b="0" dirty="0">
+                <a:solidFill>
+                  <a:srgbClr val="333333"/>
+                </a:solidFill>
+                <a:latin typeface="Consolas"/>
+              </a:rPr>
+              <a:t> </a:t>
+            </a:r>
+            <a:r>
+              <a:rPr sz="1200" b="0" dirty="0" err="1">
+                <a:solidFill>
+                  <a:srgbClr val="333333"/>
+                </a:solidFill>
+                <a:latin typeface="Consolas"/>
+              </a:rPr>
+              <a:t>tay</a:t>
+            </a:r>
+            <a:r>
+              <a:rPr sz="1200" b="0" dirty="0">
+                <a:solidFill>
+                  <a:srgbClr val="333333"/>
+                </a:solidFill>
+                <a:latin typeface="Consolas"/>
+              </a:rPr>
+              <a:t> </a:t>
+            </a:r>
+            <a:r>
+              <a:rPr sz="1200" b="0" dirty="0" err="1">
+                <a:solidFill>
+                  <a:srgbClr val="333333"/>
+                </a:solidFill>
+                <a:latin typeface="Consolas"/>
+              </a:rPr>
+              <a:t>chạy</a:t>
+            </a:r>
+            <a:r>
+              <a:rPr sz="1200" b="0" dirty="0">
+                <a:solidFill>
+                  <a:srgbClr val="333333"/>
+                </a:solidFill>
+                <a:latin typeface="Consolas"/>
+              </a:rPr>
+              <a:t> TRƯỚC.</a:t>
             </a:r>
           </a:p>
           <a:p>
             <a:pPr algn="l"/>
             <a:r>
-              <a:rPr sz="1200" b="0">
+              <a:rPr sz="1200" b="0" dirty="0">
                 <a:solidFill>
                   <a:srgbClr val="333333"/>
                 </a:solidFill>
                 <a:latin typeface="Consolas"/>
               </a:rPr>
-              <a:t>Mốc kiến trúc: GBM đặc trưng tay chạy TRƯỚC.</a:t>
-            </a:r>
-          </a:p>
-          <a:p>
-            <a:pPr algn="l"/>
-            <a:r>
-              <a:rPr sz="1200" b="0">
+              <a:t>Set Transformer </a:t>
+            </a:r>
+            <a:r>
+              <a:rPr sz="1200" b="0" dirty="0" err="1">
                 <a:solidFill>
                   <a:srgbClr val="333333"/>
                 </a:solidFill>
                 <a:latin typeface="Consolas"/>
               </a:rPr>
-              <a:t>Set Transformer là ĐỀ XUẤT, chỉ chọn nếu vượt nó.</a:t>
+              <a:t>là</a:t>
+            </a:r>
+            <a:r>
+              <a:rPr sz="1200" b="0" dirty="0">
+                <a:solidFill>
+                  <a:srgbClr val="333333"/>
+                </a:solidFill>
+                <a:latin typeface="Consolas"/>
+              </a:rPr>
+              <a:t> ĐỀ XUẤT, </a:t>
+            </a:r>
+            <a:r>
+              <a:rPr sz="1200" b="0" dirty="0" err="1">
+                <a:solidFill>
+                  <a:srgbClr val="333333"/>
+                </a:solidFill>
+                <a:latin typeface="Consolas"/>
+              </a:rPr>
+              <a:t>chỉ</a:t>
+            </a:r>
+            <a:r>
+              <a:rPr sz="1200" b="0" dirty="0">
+                <a:solidFill>
+                  <a:srgbClr val="333333"/>
+                </a:solidFill>
+                <a:latin typeface="Consolas"/>
+              </a:rPr>
+              <a:t> </a:t>
+            </a:r>
+            <a:r>
+              <a:rPr sz="1200" b="0" dirty="0" err="1">
+                <a:solidFill>
+                  <a:srgbClr val="333333"/>
+                </a:solidFill>
+                <a:latin typeface="Consolas"/>
+              </a:rPr>
+              <a:t>chọn</a:t>
+            </a:r>
+            <a:r>
+              <a:rPr sz="1200" b="0" dirty="0">
+                <a:solidFill>
+                  <a:srgbClr val="333333"/>
+                </a:solidFill>
+                <a:latin typeface="Consolas"/>
+              </a:rPr>
+              <a:t> </a:t>
+            </a:r>
+            <a:r>
+              <a:rPr sz="1200" b="0" dirty="0" err="1">
+                <a:solidFill>
+                  <a:srgbClr val="333333"/>
+                </a:solidFill>
+                <a:latin typeface="Consolas"/>
+              </a:rPr>
+              <a:t>nếu</a:t>
+            </a:r>
+            <a:r>
+              <a:rPr sz="1200" b="0" dirty="0">
+                <a:solidFill>
+                  <a:srgbClr val="333333"/>
+                </a:solidFill>
+                <a:latin typeface="Consolas"/>
+              </a:rPr>
+              <a:t> </a:t>
+            </a:r>
+            <a:r>
+              <a:rPr sz="1200" b="0" dirty="0" err="1">
+                <a:solidFill>
+                  <a:srgbClr val="333333"/>
+                </a:solidFill>
+                <a:latin typeface="Consolas"/>
+              </a:rPr>
+              <a:t>vượt</a:t>
+            </a:r>
+            <a:r>
+              <a:rPr sz="1200" b="0" dirty="0">
+                <a:solidFill>
+                  <a:srgbClr val="333333"/>
+                </a:solidFill>
+                <a:latin typeface="Consolas"/>
+              </a:rPr>
+              <a:t> </a:t>
+            </a:r>
+            <a:r>
+              <a:rPr sz="1200" b="0" dirty="0" err="1">
+                <a:solidFill>
+                  <a:srgbClr val="333333"/>
+                </a:solidFill>
+                <a:latin typeface="Consolas"/>
+              </a:rPr>
+              <a:t>nó</a:t>
+            </a:r>
+            <a:r>
+              <a:rPr sz="1200" b="0" dirty="0">
+                <a:solidFill>
+                  <a:srgbClr val="333333"/>
+                </a:solidFill>
+                <a:latin typeface="Consolas"/>
+              </a:rPr>
+              <a:t>.</a:t>
             </a:r>
           </a:p>
         </p:txBody>
@@ -4757,6 +5442,7 @@
           <a:lstStyle/>
           <a:p>
             <a:pPr algn="ctr"/>
+            <a:endParaRPr/>
           </a:p>
         </p:txBody>
       </p:sp>
@@ -4803,6 +5489,7 @@
           <a:lstStyle/>
           <a:p>
             <a:pPr algn="ctr"/>
+            <a:endParaRPr/>
           </a:p>
         </p:txBody>
       </p:sp>
@@ -4847,6 +5534,7 @@
           <a:lstStyle/>
           <a:p>
             <a:pPr algn="ctr"/>
+            <a:endParaRPr/>
           </a:p>
         </p:txBody>
       </p:sp>
@@ -4867,7 +5555,7 @@
           <a:noFill/>
         </p:spPr>
         <p:txBody>
-          <a:bodyPr wrap="square" lIns="54864" rIns="54864" tIns="18288" bIns="18288">
+          <a:bodyPr wrap="square" lIns="54864" tIns="18288" rIns="54864" bIns="18288">
             <a:spAutoFit/>
           </a:bodyPr>
           <a:lstStyle/>
@@ -4902,7 +5590,7 @@
           <a:noFill/>
         </p:spPr>
         <p:txBody>
-          <a:bodyPr wrap="square" lIns="54864" rIns="54864" tIns="18288" bIns="18288">
+          <a:bodyPr wrap="square" lIns="54864" tIns="18288" rIns="54864" bIns="18288">
             <a:spAutoFit/>
           </a:bodyPr>
           <a:lstStyle/>
@@ -4949,7 +5637,7 @@
           <a:noFill/>
         </p:spPr>
         <p:txBody>
-          <a:bodyPr wrap="square" lIns="54864" rIns="54864" tIns="18288" bIns="18288">
+          <a:bodyPr wrap="square" lIns="54864" tIns="18288" rIns="54864" bIns="18288">
             <a:spAutoFit/>
           </a:bodyPr>
           <a:lstStyle/>
@@ -4976,7 +5664,7 @@
 </file>
 
 <file path=ppt/slides/slide11.xml><?xml version="1.0" encoding="utf-8"?>
-<p:sld xmlns:a="http://schemas.openxmlformats.org/drawingml/2006/main" xmlns:p="http://schemas.openxmlformats.org/presentationml/2006/main" xmlns:r="http://schemas.openxmlformats.org/officeDocument/2006/relationships">
+<p:sld xmlns:a="http://schemas.openxmlformats.org/drawingml/2006/main" xmlns:r="http://schemas.openxmlformats.org/officeDocument/2006/relationships" xmlns:p="http://schemas.openxmlformats.org/presentationml/2006/main">
   <p:cSld>
     <p:spTree>
       <p:nvGrpSpPr>
@@ -4984,7 +5672,14 @@
         <p:cNvGrpSpPr/>
         <p:nvPr/>
       </p:nvGrpSpPr>
-      <p:grpSpPr/>
+      <p:grpSpPr>
+        <a:xfrm>
+          <a:off x="0" y="0"/>
+          <a:ext cx="0" cy="0"/>
+          <a:chOff x="0" y="0"/>
+          <a:chExt cx="0" cy="0"/>
+        </a:xfrm>
+      </p:grpSpPr>
       <p:sp>
         <p:nvSpPr>
           <p:cNvPr id="2" name="Rectangle 1"/>
@@ -5026,6 +5721,7 @@
           <a:lstStyle/>
           <a:p>
             <a:pPr algn="ctr"/>
+            <a:endParaRPr/>
           </a:p>
         </p:txBody>
       </p:sp>
@@ -5046,7 +5742,7 @@
           <a:noFill/>
         </p:spPr>
         <p:txBody>
-          <a:bodyPr wrap="square" lIns="54864" rIns="54864" tIns="18288" bIns="18288">
+          <a:bodyPr wrap="square" lIns="54864" tIns="18288" rIns="54864" bIns="18288">
             <a:spAutoFit/>
           </a:bodyPr>
           <a:lstStyle/>
@@ -5105,6 +5801,7 @@
           <a:lstStyle/>
           <a:p>
             <a:pPr algn="ctr"/>
+            <a:endParaRPr/>
           </a:p>
         </p:txBody>
       </p:sp>
@@ -5125,7 +5822,7 @@
           <a:noFill/>
         </p:spPr>
         <p:txBody>
-          <a:bodyPr wrap="square" lIns="54864" rIns="54864" tIns="18288" bIns="18288">
+          <a:bodyPr wrap="square" lIns="54864" tIns="18288" rIns="54864" bIns="18288">
             <a:spAutoFit/>
           </a:bodyPr>
           <a:lstStyle/>
@@ -5160,7 +5857,7 @@
           <a:noFill/>
         </p:spPr>
         <p:txBody>
-          <a:bodyPr wrap="square" lIns="54864" rIns="54864" tIns="18288" bIns="18288">
+          <a:bodyPr wrap="square" lIns="54864" tIns="18288" rIns="54864" bIns="18288">
             <a:spAutoFit/>
           </a:bodyPr>
           <a:lstStyle/>
@@ -5195,7 +5892,7 @@
           <a:noFill/>
         </p:spPr>
         <p:txBody>
-          <a:bodyPr wrap="square" lIns="54864" rIns="54864" tIns="18288" bIns="18288">
+          <a:bodyPr wrap="square" lIns="54864" tIns="18288" rIns="54864" bIns="18288">
             <a:spAutoFit/>
           </a:bodyPr>
           <a:lstStyle/>
@@ -5256,6 +5953,7 @@
           <a:lstStyle/>
           <a:p>
             <a:pPr algn="ctr"/>
+            <a:endParaRPr/>
           </a:p>
         </p:txBody>
       </p:sp>
@@ -5302,6 +6000,7 @@
           <a:lstStyle/>
           <a:p>
             <a:pPr algn="ctr"/>
+            <a:endParaRPr/>
           </a:p>
         </p:txBody>
       </p:sp>
@@ -5346,6 +6045,7 @@
           <a:lstStyle/>
           <a:p>
             <a:pPr algn="ctr"/>
+            <a:endParaRPr/>
           </a:p>
         </p:txBody>
       </p:sp>
@@ -5366,7 +6066,7 @@
           <a:noFill/>
         </p:spPr>
         <p:txBody>
-          <a:bodyPr wrap="square" lIns="54864" rIns="54864" tIns="18288" bIns="18288">
+          <a:bodyPr wrap="square" lIns="54864" tIns="18288" rIns="54864" bIns="18288">
             <a:spAutoFit/>
           </a:bodyPr>
           <a:lstStyle/>
@@ -5401,7 +6101,7 @@
           <a:noFill/>
         </p:spPr>
         <p:txBody>
-          <a:bodyPr wrap="square" lIns="54864" rIns="54864" tIns="18288" bIns="18288">
+          <a:bodyPr wrap="square" lIns="54864" tIns="18288" rIns="54864" bIns="18288">
             <a:spAutoFit/>
           </a:bodyPr>
           <a:lstStyle/>
@@ -5522,6 +6222,7 @@
           <a:lstStyle/>
           <a:p>
             <a:pPr algn="ctr"/>
+            <a:endParaRPr/>
           </a:p>
         </p:txBody>
       </p:sp>
@@ -5568,6 +6269,7 @@
           <a:lstStyle/>
           <a:p>
             <a:pPr algn="ctr"/>
+            <a:endParaRPr/>
           </a:p>
         </p:txBody>
       </p:sp>
@@ -5612,6 +6314,7 @@
           <a:lstStyle/>
           <a:p>
             <a:pPr algn="ctr"/>
+            <a:endParaRPr/>
           </a:p>
         </p:txBody>
       </p:sp>
@@ -5632,7 +6335,7 @@
           <a:noFill/>
         </p:spPr>
         <p:txBody>
-          <a:bodyPr wrap="square" lIns="54864" rIns="54864" tIns="18288" bIns="18288">
+          <a:bodyPr wrap="square" lIns="54864" tIns="18288" rIns="54864" bIns="18288">
             <a:spAutoFit/>
           </a:bodyPr>
           <a:lstStyle/>
@@ -5667,7 +6370,7 @@
           <a:noFill/>
         </p:spPr>
         <p:txBody>
-          <a:bodyPr wrap="square" lIns="54864" rIns="54864" tIns="18288" bIns="18288">
+          <a:bodyPr wrap="square" lIns="54864" tIns="18288" rIns="54864" bIns="18288">
             <a:spAutoFit/>
           </a:bodyPr>
           <a:lstStyle/>
@@ -5788,6 +6491,7 @@
           <a:lstStyle/>
           <a:p>
             <a:pPr algn="ctr"/>
+            <a:endParaRPr/>
           </a:p>
         </p:txBody>
       </p:sp>
@@ -5834,6 +6538,7 @@
           <a:lstStyle/>
           <a:p>
             <a:pPr algn="ctr"/>
+            <a:endParaRPr/>
           </a:p>
         </p:txBody>
       </p:sp>
@@ -5878,6 +6583,7 @@
           <a:lstStyle/>
           <a:p>
             <a:pPr algn="ctr"/>
+            <a:endParaRPr/>
           </a:p>
         </p:txBody>
       </p:sp>
@@ -5898,7 +6604,7 @@
           <a:noFill/>
         </p:spPr>
         <p:txBody>
-          <a:bodyPr wrap="square" lIns="54864" rIns="54864" tIns="18288" bIns="18288">
+          <a:bodyPr wrap="square" lIns="54864" tIns="18288" rIns="54864" bIns="18288">
             <a:spAutoFit/>
           </a:bodyPr>
           <a:lstStyle/>
@@ -5933,7 +6639,7 @@
           <a:noFill/>
         </p:spPr>
         <p:txBody>
-          <a:bodyPr wrap="square" lIns="54864" rIns="54864" tIns="18288" bIns="18288">
+          <a:bodyPr wrap="square" lIns="54864" tIns="18288" rIns="54864" bIns="18288">
             <a:spAutoFit/>
           </a:bodyPr>
           <a:lstStyle/>
@@ -6069,7 +6775,7 @@
 </file>
 
 <file path=ppt/slides/slide12.xml><?xml version="1.0" encoding="utf-8"?>
-<p:sld xmlns:a="http://schemas.openxmlformats.org/drawingml/2006/main" xmlns:p="http://schemas.openxmlformats.org/presentationml/2006/main" xmlns:r="http://schemas.openxmlformats.org/officeDocument/2006/relationships">
+<p:sld xmlns:a="http://schemas.openxmlformats.org/drawingml/2006/main" xmlns:r="http://schemas.openxmlformats.org/officeDocument/2006/relationships" xmlns:p="http://schemas.openxmlformats.org/presentationml/2006/main">
   <p:cSld>
     <p:spTree>
       <p:nvGrpSpPr>
@@ -6077,7 +6783,14 @@
         <p:cNvGrpSpPr/>
         <p:nvPr/>
       </p:nvGrpSpPr>
-      <p:grpSpPr/>
+      <p:grpSpPr>
+        <a:xfrm>
+          <a:off x="0" y="0"/>
+          <a:ext cx="0" cy="0"/>
+          <a:chOff x="0" y="0"/>
+          <a:chExt cx="0" cy="0"/>
+        </a:xfrm>
+      </p:grpSpPr>
       <p:sp>
         <p:nvSpPr>
           <p:cNvPr id="2" name="Rectangle 1"/>
@@ -6119,6 +6832,7 @@
           <a:lstStyle/>
           <a:p>
             <a:pPr algn="ctr"/>
+            <a:endParaRPr/>
           </a:p>
         </p:txBody>
       </p:sp>
@@ -6139,7 +6853,7 @@
           <a:noFill/>
         </p:spPr>
         <p:txBody>
-          <a:bodyPr wrap="square" lIns="54864" rIns="54864" tIns="18288" bIns="18288">
+          <a:bodyPr wrap="square" lIns="54864" tIns="18288" rIns="54864" bIns="18288">
             <a:spAutoFit/>
           </a:bodyPr>
           <a:lstStyle/>
@@ -6198,6 +6912,7 @@
           <a:lstStyle/>
           <a:p>
             <a:pPr algn="ctr"/>
+            <a:endParaRPr/>
           </a:p>
         </p:txBody>
       </p:sp>
@@ -6218,7 +6933,7 @@
           <a:noFill/>
         </p:spPr>
         <p:txBody>
-          <a:bodyPr wrap="square" lIns="54864" rIns="54864" tIns="18288" bIns="18288">
+          <a:bodyPr wrap="square" lIns="54864" tIns="18288" rIns="54864" bIns="18288">
             <a:spAutoFit/>
           </a:bodyPr>
           <a:lstStyle/>
@@ -6253,7 +6968,7 @@
           <a:noFill/>
         </p:spPr>
         <p:txBody>
-          <a:bodyPr wrap="square" lIns="54864" rIns="54864" tIns="18288" bIns="18288">
+          <a:bodyPr wrap="square" lIns="54864" tIns="18288" rIns="54864" bIns="18288">
             <a:spAutoFit/>
           </a:bodyPr>
           <a:lstStyle/>
@@ -6288,7 +7003,7 @@
           <a:noFill/>
         </p:spPr>
         <p:txBody>
-          <a:bodyPr wrap="square" lIns="54864" rIns="54864" tIns="18288" bIns="18288">
+          <a:bodyPr wrap="square" lIns="54864" tIns="18288" rIns="54864" bIns="18288">
             <a:spAutoFit/>
           </a:bodyPr>
           <a:lstStyle/>
@@ -6349,6 +7064,7 @@
           <a:lstStyle/>
           <a:p>
             <a:pPr algn="ctr"/>
+            <a:endParaRPr/>
           </a:p>
         </p:txBody>
       </p:sp>
@@ -6395,6 +7111,7 @@
           <a:lstStyle/>
           <a:p>
             <a:pPr algn="ctr"/>
+            <a:endParaRPr/>
           </a:p>
         </p:txBody>
       </p:sp>
@@ -6439,6 +7156,7 @@
           <a:lstStyle/>
           <a:p>
             <a:pPr algn="ctr"/>
+            <a:endParaRPr/>
           </a:p>
         </p:txBody>
       </p:sp>
@@ -6459,7 +7177,7 @@
           <a:noFill/>
         </p:spPr>
         <p:txBody>
-          <a:bodyPr wrap="square" lIns="54864" rIns="54864" tIns="18288" bIns="18288">
+          <a:bodyPr wrap="square" lIns="54864" tIns="18288" rIns="54864" bIns="18288">
             <a:spAutoFit/>
           </a:bodyPr>
           <a:lstStyle/>
@@ -6494,7 +7212,7 @@
           <a:noFill/>
         </p:spPr>
         <p:txBody>
-          <a:bodyPr wrap="square" lIns="54864" rIns="54864" tIns="18288" bIns="18288">
+          <a:bodyPr wrap="square" lIns="54864" tIns="18288" rIns="54864" bIns="18288">
             <a:spAutoFit/>
           </a:bodyPr>
           <a:lstStyle/>
@@ -6639,6 +7357,7 @@
           <a:lstStyle/>
           <a:p>
             <a:pPr algn="ctr"/>
+            <a:endParaRPr/>
           </a:p>
         </p:txBody>
       </p:sp>
@@ -6685,6 +7404,7 @@
           <a:lstStyle/>
           <a:p>
             <a:pPr algn="ctr"/>
+            <a:endParaRPr/>
           </a:p>
         </p:txBody>
       </p:sp>
@@ -6729,6 +7449,7 @@
           <a:lstStyle/>
           <a:p>
             <a:pPr algn="ctr"/>
+            <a:endParaRPr/>
           </a:p>
         </p:txBody>
       </p:sp>
@@ -6749,7 +7470,7 @@
           <a:noFill/>
         </p:spPr>
         <p:txBody>
-          <a:bodyPr wrap="square" lIns="54864" rIns="54864" tIns="18288" bIns="18288">
+          <a:bodyPr wrap="square" lIns="54864" tIns="18288" rIns="54864" bIns="18288">
             <a:spAutoFit/>
           </a:bodyPr>
           <a:lstStyle/>
@@ -6784,7 +7505,7 @@
           <a:noFill/>
         </p:spPr>
         <p:txBody>
-          <a:bodyPr wrap="square" lIns="54864" rIns="54864" tIns="18288" bIns="18288">
+          <a:bodyPr wrap="square" lIns="54864" tIns="18288" rIns="54864" bIns="18288">
             <a:spAutoFit/>
           </a:bodyPr>
           <a:lstStyle/>
@@ -6921,6 +7642,7 @@
           <a:lstStyle/>
           <a:p>
             <a:pPr algn="ctr"/>
+            <a:endParaRPr/>
           </a:p>
         </p:txBody>
       </p:sp>
@@ -6967,6 +7689,7 @@
           <a:lstStyle/>
           <a:p>
             <a:pPr algn="ctr"/>
+            <a:endParaRPr/>
           </a:p>
         </p:txBody>
       </p:sp>
@@ -7011,6 +7734,7 @@
           <a:lstStyle/>
           <a:p>
             <a:pPr algn="ctr"/>
+            <a:endParaRPr/>
           </a:p>
         </p:txBody>
       </p:sp>
@@ -7031,7 +7755,7 @@
           <a:noFill/>
         </p:spPr>
         <p:txBody>
-          <a:bodyPr wrap="square" lIns="54864" rIns="54864" tIns="18288" bIns="18288">
+          <a:bodyPr wrap="square" lIns="54864" tIns="18288" rIns="54864" bIns="18288">
             <a:spAutoFit/>
           </a:bodyPr>
           <a:lstStyle/>
@@ -7066,7 +7790,7 @@
           <a:noFill/>
         </p:spPr>
         <p:txBody>
-          <a:bodyPr wrap="square" lIns="54864" rIns="54864" tIns="18288" bIns="18288">
+          <a:bodyPr wrap="square" lIns="54864" tIns="18288" rIns="54864" bIns="18288">
             <a:spAutoFit/>
           </a:bodyPr>
           <a:lstStyle/>
@@ -7120,6 +7844,15 @@
           </a:p>
           <a:p>
             <a:pPr algn="l"/>
+            <a:endParaRPr sz="1100" b="0">
+              <a:solidFill>
+                <a:srgbClr val="333333"/>
+              </a:solidFill>
+              <a:latin typeface="Consolas"/>
+            </a:endParaRPr>
+          </a:p>
+          <a:p>
+            <a:pPr algn="l"/>
             <a:r>
               <a:rPr sz="1100" b="0">
                 <a:solidFill>
@@ -7127,7 +7860,7 @@
                 </a:solidFill>
                 <a:latin typeface="Consolas"/>
               </a:rPr>
-              <a:t/>
+              <a:t>|S*| ≤ 5  quét hết ngay    ·    6 ≤ |S*| ≤ 10  tỉa xuống ≤ 5 rồi quét hết    ·    |S*| ≥ 11  cứu</a:t>
             </a:r>
           </a:p>
           <a:p>
@@ -7139,7 +7872,7 @@
                 </a:solidFill>
                 <a:latin typeface="Consolas"/>
               </a:rPr>
-              <a:t>|S*| ≤ 5  quét hết ngay    ·    6 ≤ |S*| ≤ 10  tỉa xuống ≤ 5 rồi quét hết    ·    |S*| ≥ 11  cứu</a:t>
+              <a:t>tỉa còn rẻ hơn cứu tới s ≈ 20, nên ranh giới 10/11 KHÔNG đặt theo tiền — ở cỡ đó ta không còn tin</a:t>
             </a:r>
           </a:p>
           <a:p>
@@ -7151,32 +7884,17 @@
                 </a:solidFill>
                 <a:latin typeface="Consolas"/>
               </a:rPr>
-              <a:t>tỉa còn rẻ hơn cứu tới s ≈ 20, nên ranh giới 10/11 KHÔNG đặt theo tiền — ở cỡ đó ta không còn tin</a:t>
+              <a:t>điểm xuất phát đủ để tỉa 15 lượt theo chỉ dẫn của chính mô hình đang sai.  Tỉa KẸT ở ≥ 6 → cứu.</a:t>
             </a:r>
           </a:p>
           <a:p>
             <a:pPr algn="l"/>
-            <a:r>
-              <a:rPr sz="1100" b="0">
-                <a:solidFill>
-                  <a:srgbClr val="333333"/>
-                </a:solidFill>
-                <a:latin typeface="Consolas"/>
-              </a:rPr>
-              <a:t>điểm xuất phát đủ để tỉa 15 lượt theo chỉ dẫn của chính mô hình đang sai.  Tỉa KẸT ở ≥ 6 → cứu.</a:t>
-            </a:r>
-          </a:p>
-          <a:p>
-            <a:pPr algn="l"/>
-            <a:r>
-              <a:rPr sz="1100" b="0">
-                <a:solidFill>
-                  <a:srgbClr val="333333"/>
-                </a:solidFill>
-                <a:latin typeface="Consolas"/>
-              </a:rPr>
-              <a:t/>
-            </a:r>
+            <a:endParaRPr sz="1100" b="0">
+              <a:solidFill>
+                <a:srgbClr val="333333"/>
+              </a:solidFill>
+              <a:latin typeface="Consolas"/>
+            </a:endParaRPr>
           </a:p>
           <a:p>
             <a:pPr algn="l"/>
@@ -34871,7 +35589,7 @@
         <p:spPr>
           <a:xfrm>
             <a:off x="6309360" y="1298448"/>
-            <a:ext cx="5129783" cy="1188720"/>
+            <a:ext cx="5129783" cy="1139799"/>
           </a:xfrm>
           <a:prstGeom prst="rect">
             <a:avLst/>
@@ -34890,38 +35608,42 @@
               </a:spcAft>
             </a:pPr>
             <a:r>
-              <a:rPr sz="1300" b="0">
+              <a:rPr sz="1300" b="0" dirty="0">
                 <a:solidFill>
                   <a:srgbClr val="333333"/>
                 </a:solidFill>
                 <a:latin typeface="Consolas"/>
               </a:rPr>
-              <a:t>S thắng   &lt;=&gt;   v(S) &gt;= tau</a:t>
-            </a:r>
-          </a:p>
-          <a:p>
-            <a:pPr algn="l">
-              <a:spcAft>
-                <a:spcPts val="200"/>
-              </a:spcAft>
-            </a:pPr>
-            <a:r>
-              <a:rPr sz="1300" b="0">
+              <a:t>S </a:t>
+            </a:r>
+            <a:r>
+              <a:rPr sz="1300" b="0" dirty="0" err="1">
                 <a:solidFill>
                   <a:srgbClr val="333333"/>
                 </a:solidFill>
                 <a:latin typeface="Consolas"/>
               </a:rPr>
-              <a:t>                "chừng này đoạn là đủ"</a:t>
-            </a:r>
-          </a:p>
-          <a:p>
-            <a:pPr algn="l">
-              <a:spcAft>
-                <a:spcPts val="200"/>
-              </a:spcAft>
-            </a:pPr>
-            <a:endParaRPr sz="1300" b="0">
+              <a:t>thắng</a:t>
+            </a:r>
+            <a:r>
+              <a:rPr sz="1300" b="0" dirty="0">
+                <a:solidFill>
+                  <a:srgbClr val="333333"/>
+                </a:solidFill>
+                <a:latin typeface="Consolas"/>
+              </a:rPr>
+              <a:t>   &lt;=&gt;   v(S) &gt;= </a:t>
+            </a:r>
+            <a:r>
+              <a:rPr lang="vi-VN" sz="1300" b="0" dirty="0">
+                <a:solidFill>
+                  <a:srgbClr val="333333"/>
+                </a:solidFill>
+                <a:latin typeface="Consolas"/>
+              </a:rPr>
+              <a:t>tau*v(full_context)</a:t>
+            </a:r>
+            <a:endParaRPr sz="1300" b="0" dirty="0">
               <a:solidFill>
                 <a:srgbClr val="333333"/>
               </a:solidFill>
@@ -34935,13 +35657,103 @@
               </a:spcAft>
             </a:pPr>
             <a:r>
-              <a:rPr sz="1300" b="0">
+              <a:rPr sz="1300" b="0" dirty="0">
                 <a:solidFill>
                   <a:srgbClr val="333333"/>
                 </a:solidFill>
                 <a:latin typeface="Consolas"/>
               </a:rPr>
-              <a:t>liên minh thắng tối tiểu  (MWC)</a:t>
+              <a:t>                "</a:t>
+            </a:r>
+            <a:r>
+              <a:rPr sz="1300" b="0" dirty="0" err="1">
+                <a:solidFill>
+                  <a:srgbClr val="333333"/>
+                </a:solidFill>
+                <a:latin typeface="Consolas"/>
+              </a:rPr>
+              <a:t>chừng</a:t>
+            </a:r>
+            <a:r>
+              <a:rPr sz="1300" b="0" dirty="0">
+                <a:solidFill>
+                  <a:srgbClr val="333333"/>
+                </a:solidFill>
+                <a:latin typeface="Consolas"/>
+              </a:rPr>
+              <a:t> </a:t>
+            </a:r>
+            <a:r>
+              <a:rPr sz="1300" b="0" dirty="0" err="1">
+                <a:solidFill>
+                  <a:srgbClr val="333333"/>
+                </a:solidFill>
+                <a:latin typeface="Consolas"/>
+              </a:rPr>
+              <a:t>này</a:t>
+            </a:r>
+            <a:r>
+              <a:rPr sz="1300" b="0" dirty="0">
+                <a:solidFill>
+                  <a:srgbClr val="333333"/>
+                </a:solidFill>
+                <a:latin typeface="Consolas"/>
+              </a:rPr>
+              <a:t> </a:t>
+            </a:r>
+            <a:r>
+              <a:rPr sz="1300" b="0" dirty="0" err="1">
+                <a:solidFill>
+                  <a:srgbClr val="333333"/>
+                </a:solidFill>
+                <a:latin typeface="Consolas"/>
+              </a:rPr>
+              <a:t>đoạn</a:t>
+            </a:r>
+            <a:r>
+              <a:rPr sz="1300" b="0" dirty="0">
+                <a:solidFill>
+                  <a:srgbClr val="333333"/>
+                </a:solidFill>
+                <a:latin typeface="Consolas"/>
+              </a:rPr>
+              <a:t> </a:t>
+            </a:r>
+            <a:r>
+              <a:rPr sz="1300" b="0" dirty="0" err="1">
+                <a:solidFill>
+                  <a:srgbClr val="333333"/>
+                </a:solidFill>
+                <a:latin typeface="Consolas"/>
+              </a:rPr>
+              <a:t>là</a:t>
+            </a:r>
+            <a:r>
+              <a:rPr sz="1300" b="0" dirty="0">
+                <a:solidFill>
+                  <a:srgbClr val="333333"/>
+                </a:solidFill>
+                <a:latin typeface="Consolas"/>
+              </a:rPr>
+              <a:t> </a:t>
+            </a:r>
+            <a:r>
+              <a:rPr sz="1300" b="0" dirty="0" err="1">
+                <a:solidFill>
+                  <a:srgbClr val="333333"/>
+                </a:solidFill>
+                <a:latin typeface="Consolas"/>
+              </a:rPr>
+              <a:t>đủ</a:t>
+            </a:r>
+            <a:r>
+              <a:rPr sz="1300" b="0" dirty="0">
+                <a:solidFill>
+                  <a:srgbClr val="333333"/>
+                </a:solidFill>
+                <a:latin typeface="Consolas"/>
+              </a:rPr>
+              <a:t>"</a:t>
             </a:r>
           </a:p>
           <a:p>
@@ -34950,15 +35762,230 @@
                 <a:spcPts val="200"/>
               </a:spcAft>
             </a:pPr>
-            <a:r>
-              <a:rPr sz="1300" b="0">
+            <a:endParaRPr sz="1300" b="0" dirty="0">
+              <a:solidFill>
+                <a:srgbClr val="333333"/>
+              </a:solidFill>
+              <a:latin typeface="Consolas"/>
+            </a:endParaRPr>
+          </a:p>
+          <a:p>
+            <a:pPr algn="l">
+              <a:spcAft>
+                <a:spcPts val="200"/>
+              </a:spcAft>
+            </a:pPr>
+            <a:r>
+              <a:rPr sz="1300" b="0" dirty="0" err="1">
                 <a:solidFill>
                   <a:srgbClr val="333333"/>
                 </a:solidFill>
                 <a:latin typeface="Consolas"/>
               </a:rPr>
-              <a:t>   thắng, mà bỏ ai cũng thành thua</a:t>
-            </a:r>
+              <a:t>liên</a:t>
+            </a:r>
+            <a:r>
+              <a:rPr sz="1300" b="0" dirty="0">
+                <a:solidFill>
+                  <a:srgbClr val="333333"/>
+                </a:solidFill>
+                <a:latin typeface="Consolas"/>
+              </a:rPr>
+              <a:t> </a:t>
+            </a:r>
+            <a:r>
+              <a:rPr sz="1300" b="0" dirty="0" err="1">
+                <a:solidFill>
+                  <a:srgbClr val="333333"/>
+                </a:solidFill>
+                <a:latin typeface="Consolas"/>
+              </a:rPr>
+              <a:t>minh</a:t>
+            </a:r>
+            <a:r>
+              <a:rPr sz="1300" b="0" dirty="0">
+                <a:solidFill>
+                  <a:srgbClr val="333333"/>
+                </a:solidFill>
+                <a:latin typeface="Consolas"/>
+              </a:rPr>
+              <a:t> </a:t>
+            </a:r>
+            <a:r>
+              <a:rPr sz="1300" b="0" dirty="0" err="1">
+                <a:solidFill>
+                  <a:srgbClr val="333333"/>
+                </a:solidFill>
+                <a:latin typeface="Consolas"/>
+              </a:rPr>
+              <a:t>thắng</a:t>
+            </a:r>
+            <a:r>
+              <a:rPr sz="1300" b="0" dirty="0">
+                <a:solidFill>
+                  <a:srgbClr val="333333"/>
+                </a:solidFill>
+                <a:latin typeface="Consolas"/>
+              </a:rPr>
+              <a:t> </a:t>
+            </a:r>
+            <a:r>
+              <a:rPr sz="1300" b="0" dirty="0" err="1">
+                <a:solidFill>
+                  <a:srgbClr val="333333"/>
+                </a:solidFill>
+                <a:latin typeface="Consolas"/>
+              </a:rPr>
+              <a:t>tối</a:t>
+            </a:r>
+            <a:r>
+              <a:rPr sz="1300" b="0" dirty="0">
+                <a:solidFill>
+                  <a:srgbClr val="333333"/>
+                </a:solidFill>
+                <a:latin typeface="Consolas"/>
+              </a:rPr>
+              <a:t> </a:t>
+            </a:r>
+            <a:r>
+              <a:rPr sz="1300" b="0" dirty="0" err="1">
+                <a:solidFill>
+                  <a:srgbClr val="333333"/>
+                </a:solidFill>
+                <a:latin typeface="Consolas"/>
+              </a:rPr>
+              <a:t>tiểu</a:t>
+            </a:r>
+            <a:r>
+              <a:rPr sz="1300" b="0" dirty="0">
+                <a:solidFill>
+                  <a:srgbClr val="333333"/>
+                </a:solidFill>
+                <a:latin typeface="Consolas"/>
+              </a:rPr>
+              <a:t>  (MWC)</a:t>
+            </a:r>
+          </a:p>
+          <a:p>
+            <a:pPr algn="l">
+              <a:spcAft>
+                <a:spcPts val="200"/>
+              </a:spcAft>
+            </a:pPr>
+            <a:r>
+              <a:rPr sz="1300" b="0" dirty="0">
+                <a:solidFill>
+                  <a:srgbClr val="333333"/>
+                </a:solidFill>
+                <a:latin typeface="Consolas"/>
+              </a:rPr>
+              <a:t>   </a:t>
+            </a:r>
+            <a:r>
+              <a:rPr sz="1300" b="0" dirty="0" err="1">
+                <a:solidFill>
+                  <a:srgbClr val="333333"/>
+                </a:solidFill>
+                <a:latin typeface="Consolas"/>
+              </a:rPr>
+              <a:t>thắng</a:t>
+            </a:r>
+            <a:r>
+              <a:rPr sz="1300" b="0" dirty="0">
+                <a:solidFill>
+                  <a:srgbClr val="333333"/>
+                </a:solidFill>
+                <a:latin typeface="Consolas"/>
+              </a:rPr>
+              <a:t>, </a:t>
+            </a:r>
+            <a:r>
+              <a:rPr sz="1300" b="0" dirty="0" err="1">
+                <a:solidFill>
+                  <a:srgbClr val="333333"/>
+                </a:solidFill>
+                <a:latin typeface="Consolas"/>
+              </a:rPr>
+              <a:t>mà</a:t>
+            </a:r>
+            <a:r>
+              <a:rPr sz="1300" b="0" dirty="0">
+                <a:solidFill>
+                  <a:srgbClr val="333333"/>
+                </a:solidFill>
+                <a:latin typeface="Consolas"/>
+              </a:rPr>
+              <a:t> </a:t>
+            </a:r>
+            <a:r>
+              <a:rPr sz="1300" b="0" dirty="0" err="1">
+                <a:solidFill>
+                  <a:srgbClr val="333333"/>
+                </a:solidFill>
+                <a:latin typeface="Consolas"/>
+              </a:rPr>
+              <a:t>bỏ</a:t>
+            </a:r>
+            <a:r>
+              <a:rPr sz="1300" b="0" dirty="0">
+                <a:solidFill>
+                  <a:srgbClr val="333333"/>
+                </a:solidFill>
+                <a:latin typeface="Consolas"/>
+              </a:rPr>
+              <a:t> ai </a:t>
+            </a:r>
+            <a:r>
+              <a:rPr sz="1300" b="0" dirty="0" err="1">
+                <a:solidFill>
+                  <a:srgbClr val="333333"/>
+                </a:solidFill>
+                <a:latin typeface="Consolas"/>
+              </a:rPr>
+              <a:t>cũng</a:t>
+            </a:r>
+            <a:r>
+              <a:rPr sz="1300" b="0" dirty="0">
+                <a:solidFill>
+                  <a:srgbClr val="333333"/>
+                </a:solidFill>
+                <a:latin typeface="Consolas"/>
+              </a:rPr>
+              <a:t> </a:t>
+            </a:r>
+            <a:r>
+              <a:rPr sz="1300" b="0" dirty="0" err="1">
+                <a:solidFill>
+                  <a:srgbClr val="333333"/>
+                </a:solidFill>
+                <a:latin typeface="Consolas"/>
+              </a:rPr>
+              <a:t>thành</a:t>
+            </a:r>
+            <a:r>
+              <a:rPr sz="1300" b="0" dirty="0">
+                <a:solidFill>
+                  <a:srgbClr val="333333"/>
+                </a:solidFill>
+                <a:latin typeface="Consolas"/>
+              </a:rPr>
+              <a:t> </a:t>
+            </a:r>
+            <a:r>
+              <a:rPr sz="1300" b="0" dirty="0" err="1">
+                <a:solidFill>
+                  <a:srgbClr val="333333"/>
+                </a:solidFill>
+                <a:latin typeface="Consolas"/>
+              </a:rPr>
+              <a:t>thua</a:t>
+            </a:r>
+            <a:endParaRPr sz="1300" b="0" dirty="0">
+              <a:solidFill>
+                <a:srgbClr val="333333"/>
+              </a:solidFill>
+              <a:latin typeface="Consolas"/>
+            </a:endParaRPr>
           </a:p>
         </p:txBody>
       </p:sp>
@@ -40643,6 +41670,7 @@
           <a:lstStyle/>
           <a:p>
             <a:pPr algn="ctr"/>
+            <a:endParaRPr/>
           </a:p>
         </p:txBody>
       </p:sp>
@@ -40663,7 +41691,7 @@
           <a:noFill/>
         </p:spPr>
         <p:txBody>
-          <a:bodyPr wrap="square" lIns="54864" rIns="54864" tIns="18288" bIns="18288">
+          <a:bodyPr wrap="square" lIns="54864" tIns="18288" rIns="54864" bIns="18288">
             <a:spAutoFit/>
           </a:bodyPr>
           <a:lstStyle/>
@@ -40722,6 +41750,7 @@
           <a:lstStyle/>
           <a:p>
             <a:pPr algn="ctr"/>
+            <a:endParaRPr/>
           </a:p>
         </p:txBody>
       </p:sp>
@@ -40742,7 +41771,7 @@
           <a:noFill/>
         </p:spPr>
         <p:txBody>
-          <a:bodyPr wrap="square" lIns="54864" rIns="54864" tIns="18288" bIns="18288">
+          <a:bodyPr wrap="square" lIns="54864" tIns="18288" rIns="54864" bIns="18288">
             <a:spAutoFit/>
           </a:bodyPr>
           <a:lstStyle/>
@@ -40777,7 +41806,7 @@
           <a:noFill/>
         </p:spPr>
         <p:txBody>
-          <a:bodyPr wrap="square" lIns="54864" rIns="54864" tIns="18288" bIns="18288">
+          <a:bodyPr wrap="square" lIns="54864" tIns="18288" rIns="54864" bIns="18288">
             <a:spAutoFit/>
           </a:bodyPr>
           <a:lstStyle/>
@@ -40812,7 +41841,7 @@
           <a:noFill/>
         </p:spPr>
         <p:txBody>
-          <a:bodyPr wrap="square" lIns="54864" rIns="54864" tIns="18288" bIns="18288">
+          <a:bodyPr wrap="square" lIns="54864" tIns="18288" rIns="54864" bIns="18288">
             <a:spAutoFit/>
           </a:bodyPr>
           <a:lstStyle/>
@@ -40873,6 +41902,7 @@
           <a:lstStyle/>
           <a:p>
             <a:pPr algn="ctr"/>
+            <a:endParaRPr/>
           </a:p>
         </p:txBody>
       </p:sp>
@@ -40919,6 +41949,7 @@
           <a:lstStyle/>
           <a:p>
             <a:pPr algn="ctr"/>
+            <a:endParaRPr/>
           </a:p>
         </p:txBody>
       </p:sp>
@@ -40963,6 +41994,7 @@
           <a:lstStyle/>
           <a:p>
             <a:pPr algn="ctr"/>
+            <a:endParaRPr/>
           </a:p>
         </p:txBody>
       </p:sp>
@@ -40983,7 +42015,7 @@
           <a:noFill/>
         </p:spPr>
         <p:txBody>
-          <a:bodyPr wrap="square" lIns="54864" rIns="54864" tIns="18288" bIns="18288">
+          <a:bodyPr wrap="square" lIns="54864" tIns="18288" rIns="54864" bIns="18288">
             <a:spAutoFit/>
           </a:bodyPr>
           <a:lstStyle/>
@@ -41018,7 +42050,7 @@
           <a:noFill/>
         </p:spPr>
         <p:txBody>
-          <a:bodyPr wrap="square" lIns="54864" rIns="54864" tIns="18288" bIns="18288">
+          <a:bodyPr wrap="square" lIns="54864" tIns="18288" rIns="54864" bIns="18288">
             <a:spAutoFit/>
           </a:bodyPr>
           <a:lstStyle/>
@@ -41151,6 +42183,7 @@
           <a:lstStyle/>
           <a:p>
             <a:pPr algn="ctr"/>
+            <a:endParaRPr/>
           </a:p>
         </p:txBody>
       </p:sp>
@@ -41197,6 +42230,7 @@
           <a:lstStyle/>
           <a:p>
             <a:pPr algn="ctr"/>
+            <a:endParaRPr/>
           </a:p>
         </p:txBody>
       </p:sp>
@@ -41241,6 +42275,7 @@
           <a:lstStyle/>
           <a:p>
             <a:pPr algn="ctr"/>
+            <a:endParaRPr/>
           </a:p>
         </p:txBody>
       </p:sp>
@@ -41261,7 +42296,7 @@
           <a:noFill/>
         </p:spPr>
         <p:txBody>
-          <a:bodyPr wrap="square" lIns="54864" rIns="54864" tIns="18288" bIns="18288">
+          <a:bodyPr wrap="square" lIns="54864" tIns="18288" rIns="54864" bIns="18288">
             <a:spAutoFit/>
           </a:bodyPr>
           <a:lstStyle/>
@@ -41296,7 +42331,7 @@
           <a:noFill/>
         </p:spPr>
         <p:txBody>
-          <a:bodyPr wrap="square" lIns="54864" rIns="54864" tIns="18288" bIns="18288">
+          <a:bodyPr wrap="square" lIns="54864" tIns="18288" rIns="54864" bIns="18288">
             <a:spAutoFit/>
           </a:bodyPr>
           <a:lstStyle/>
@@ -41430,6 +42465,7 @@
           <a:lstStyle/>
           <a:p>
             <a:pPr algn="ctr"/>
+            <a:endParaRPr/>
           </a:p>
         </p:txBody>
       </p:sp>
@@ -41476,6 +42512,7 @@
           <a:lstStyle/>
           <a:p>
             <a:pPr algn="ctr"/>
+            <a:endParaRPr/>
           </a:p>
         </p:txBody>
       </p:sp>
@@ -41520,6 +42557,7 @@
           <a:lstStyle/>
           <a:p>
             <a:pPr algn="ctr"/>
+            <a:endParaRPr/>
           </a:p>
         </p:txBody>
       </p:sp>
@@ -41540,7 +42578,7 @@
           <a:noFill/>
         </p:spPr>
         <p:txBody>
-          <a:bodyPr wrap="square" lIns="54864" rIns="54864" tIns="18288" bIns="18288">
+          <a:bodyPr wrap="square" lIns="54864" tIns="18288" rIns="54864" bIns="18288">
             <a:spAutoFit/>
           </a:bodyPr>
           <a:lstStyle/>
@@ -41575,7 +42613,7 @@
           <a:noFill/>
         </p:spPr>
         <p:txBody>
-          <a:bodyPr wrap="square" lIns="54864" rIns="54864" tIns="18288" bIns="18288">
+          <a:bodyPr wrap="square" lIns="54864" tIns="18288" rIns="54864" bIns="18288">
             <a:spAutoFit/>
           </a:bodyPr>
           <a:lstStyle/>
@@ -41709,6 +42747,7 @@
           <a:lstStyle/>
           <a:p>
             <a:pPr algn="ctr"/>
+            <a:endParaRPr/>
           </a:p>
         </p:txBody>
       </p:sp>
@@ -41755,6 +42794,7 @@
           <a:lstStyle/>
           <a:p>
             <a:pPr algn="ctr"/>
+            <a:endParaRPr/>
           </a:p>
         </p:txBody>
       </p:sp>
@@ -41799,6 +42839,7 @@
           <a:lstStyle/>
           <a:p>
             <a:pPr algn="ctr"/>
+            <a:endParaRPr/>
           </a:p>
         </p:txBody>
       </p:sp>
@@ -41819,7 +42860,7 @@
           <a:noFill/>
         </p:spPr>
         <p:txBody>
-          <a:bodyPr wrap="square" lIns="54864" rIns="54864" tIns="18288" bIns="18288">
+          <a:bodyPr wrap="square" lIns="54864" tIns="18288" rIns="54864" bIns="18288">
             <a:spAutoFit/>
           </a:bodyPr>
           <a:lstStyle/>
@@ -41854,7 +42895,7 @@
           <a:noFill/>
         </p:spPr>
         <p:txBody>
-          <a:bodyPr wrap="square" lIns="54864" rIns="54864" tIns="18288" bIns="18288">
+          <a:bodyPr wrap="square" lIns="54864" tIns="18288" rIns="54864" bIns="18288">
             <a:spAutoFit/>
           </a:bodyPr>
           <a:lstStyle/>
@@ -41987,6 +43028,7 @@
           <a:lstStyle/>
           <a:p>
             <a:pPr algn="ctr"/>
+            <a:endParaRPr/>
           </a:p>
         </p:txBody>
       </p:sp>
@@ -42033,6 +43075,7 @@
           <a:lstStyle/>
           <a:p>
             <a:pPr algn="ctr"/>
+            <a:endParaRPr/>
           </a:p>
         </p:txBody>
       </p:sp>
@@ -42077,6 +43120,7 @@
           <a:lstStyle/>
           <a:p>
             <a:pPr algn="ctr"/>
+            <a:endParaRPr/>
           </a:p>
         </p:txBody>
       </p:sp>
@@ -42097,7 +43141,7 @@
           <a:noFill/>
         </p:spPr>
         <p:txBody>
-          <a:bodyPr wrap="square" lIns="54864" rIns="54864" tIns="18288" bIns="18288">
+          <a:bodyPr wrap="square" lIns="54864" tIns="18288" rIns="54864" bIns="18288">
             <a:spAutoFit/>
           </a:bodyPr>
           <a:lstStyle/>
@@ -42132,7 +43176,7 @@
           <a:noFill/>
         </p:spPr>
         <p:txBody>
-          <a:bodyPr wrap="square" lIns="54864" rIns="54864" tIns="18288" bIns="18288">
+          <a:bodyPr wrap="square" lIns="54864" tIns="18288" rIns="54864" bIns="18288">
             <a:spAutoFit/>
           </a:bodyPr>
           <a:lstStyle/>
@@ -43605,24 +44649,6 @@
               </a:rPr>
               <a:t>bốn vòng → g_θ → beam search → S*</a:t>
             </a:r>
-            <a:r>
-              <a:rPr sz="1400" b="1" baseline="-25000">
-                <a:solidFill>
-                  <a:srgbClr val="0E3F92"/>
-                </a:solidFill>
-                <a:latin typeface="Arial"/>
-              </a:rPr>
-              <a:t/>
-            </a:r>
-            <a:r>
-              <a:rPr sz="1400" b="1">
-                <a:solidFill>
-                  <a:srgbClr val="0E3F92"/>
-                </a:solidFill>
-                <a:latin typeface="Arial"/>
-              </a:rPr>
-              <a:t/>
-            </a:r>
           </a:p>
         </p:txBody>
       </p:sp>
@@ -44647,7 +45673,7 @@
           </a:fontRef>
         </p:style>
         <p:txBody>
-          <a:bodyPr rtlCol="0" anchor="ctr" lIns="292608"/>
+          <a:bodyPr lIns="292608" rtlCol="0" anchor="ctr"/>
           <a:lstStyle/>
           <a:p>
             <a:pPr algn="l"/>
@@ -44704,6 +45730,7 @@
           <a:lstStyle/>
           <a:p>
             <a:pPr algn="ctr"/>
+            <a:endParaRPr/>
           </a:p>
         </p:txBody>
       </p:sp>
@@ -44724,7 +45751,7 @@
           <a:noFill/>
         </p:spPr>
         <p:txBody>
-          <a:bodyPr wrap="square" anchor="ctr" lIns="54864" rIns="54864" tIns="18288" bIns="18288">
+          <a:bodyPr wrap="square" lIns="54864" tIns="18288" rIns="54864" bIns="18288" anchor="ctr">
             <a:spAutoFit/>
           </a:bodyPr>
           <a:lstStyle/>
@@ -44763,7 +45790,7 @@
           <a:noFill/>
         </p:spPr>
         <p:txBody>
-          <a:bodyPr wrap="square" anchor="ctr" lIns="54864" rIns="54864" tIns="18288" bIns="18288">
+          <a:bodyPr wrap="square" lIns="54864" tIns="18288" rIns="54864" bIns="18288" anchor="ctr">
             <a:spAutoFit/>
           </a:bodyPr>
           <a:lstStyle/>
@@ -44793,7 +45820,7 @@
         </p:nvSpPr>
         <p:spPr>
           <a:xfrm>
-            <a:off x="640080" y="877824"/>
+            <a:off x="640080" y="908009"/>
             <a:ext cx="10972800" cy="438912"/>
           </a:xfrm>
           <a:prstGeom prst="rect">
@@ -44802,7 +45829,7 @@
           <a:noFill/>
         </p:spPr>
         <p:txBody>
-          <a:bodyPr wrap="square" anchor="t" lIns="54864" rIns="54864" tIns="18288" bIns="18288">
+          <a:bodyPr wrap="square" lIns="54864" tIns="18288" rIns="54864" bIns="18288" anchor="t">
             <a:spAutoFit/>
           </a:bodyPr>
           <a:lstStyle/>
@@ -44813,14 +45840,380 @@
               </a:spcAft>
             </a:pPr>
             <a:r>
-              <a:rPr sz="1400" b="0">
-                <a:solidFill>
-                  <a:srgbClr val="333333"/>
-                </a:solidFill>
-                <a:latin typeface="Arial"/>
-              </a:rPr>
-              <a:t>g_θ chỉ cần trả lời một câu: «g_θ(S) ≥ tau_q ?».  Nên nó là bộ phân loại ở biên, không phải bộ hồi quy</a:t>
-            </a:r>
+              <a:rPr sz="1400" b="0" dirty="0" err="1">
+                <a:solidFill>
+                  <a:srgbClr val="333333"/>
+                </a:solidFill>
+                <a:latin typeface="Arial"/>
+              </a:rPr>
+              <a:t>g_θ</a:t>
+            </a:r>
+            <a:r>
+              <a:rPr sz="1400" b="0" dirty="0">
+                <a:solidFill>
+                  <a:srgbClr val="333333"/>
+                </a:solidFill>
+                <a:latin typeface="Arial"/>
+              </a:rPr>
+              <a:t> </a:t>
+            </a:r>
+            <a:r>
+              <a:rPr sz="1400" b="0" dirty="0" err="1">
+                <a:solidFill>
+                  <a:srgbClr val="333333"/>
+                </a:solidFill>
+                <a:latin typeface="Arial"/>
+              </a:rPr>
+              <a:t>chỉ</a:t>
+            </a:r>
+            <a:r>
+              <a:rPr sz="1400" b="0" dirty="0">
+                <a:solidFill>
+                  <a:srgbClr val="333333"/>
+                </a:solidFill>
+                <a:latin typeface="Arial"/>
+              </a:rPr>
+              <a:t> </a:t>
+            </a:r>
+            <a:r>
+              <a:rPr sz="1400" b="0" dirty="0" err="1">
+                <a:solidFill>
+                  <a:srgbClr val="333333"/>
+                </a:solidFill>
+                <a:latin typeface="Arial"/>
+              </a:rPr>
+              <a:t>cần</a:t>
+            </a:r>
+            <a:r>
+              <a:rPr sz="1400" b="0" dirty="0">
+                <a:solidFill>
+                  <a:srgbClr val="333333"/>
+                </a:solidFill>
+                <a:latin typeface="Arial"/>
+              </a:rPr>
+              <a:t> </a:t>
+            </a:r>
+            <a:r>
+              <a:rPr sz="1400" b="0" dirty="0" err="1">
+                <a:solidFill>
+                  <a:srgbClr val="333333"/>
+                </a:solidFill>
+                <a:latin typeface="Arial"/>
+              </a:rPr>
+              <a:t>trả</a:t>
+            </a:r>
+            <a:r>
+              <a:rPr sz="1400" b="0" dirty="0">
+                <a:solidFill>
+                  <a:srgbClr val="333333"/>
+                </a:solidFill>
+                <a:latin typeface="Arial"/>
+              </a:rPr>
+              <a:t> </a:t>
+            </a:r>
+            <a:r>
+              <a:rPr sz="1400" b="0" dirty="0" err="1">
+                <a:solidFill>
+                  <a:srgbClr val="333333"/>
+                </a:solidFill>
+                <a:latin typeface="Arial"/>
+              </a:rPr>
+              <a:t>lời</a:t>
+            </a:r>
+            <a:r>
+              <a:rPr sz="1400" b="0" dirty="0">
+                <a:solidFill>
+                  <a:srgbClr val="333333"/>
+                </a:solidFill>
+                <a:latin typeface="Arial"/>
+              </a:rPr>
+              <a:t> </a:t>
+            </a:r>
+            <a:r>
+              <a:rPr sz="1400" b="0" dirty="0" err="1">
+                <a:solidFill>
+                  <a:srgbClr val="333333"/>
+                </a:solidFill>
+                <a:latin typeface="Arial"/>
+              </a:rPr>
+              <a:t>một</a:t>
+            </a:r>
+            <a:r>
+              <a:rPr sz="1400" b="0" dirty="0">
+                <a:solidFill>
+                  <a:srgbClr val="333333"/>
+                </a:solidFill>
+                <a:latin typeface="Arial"/>
+              </a:rPr>
+              <a:t> </a:t>
+            </a:r>
+            <a:r>
+              <a:rPr sz="1400" b="0" dirty="0" err="1">
+                <a:solidFill>
+                  <a:srgbClr val="333333"/>
+                </a:solidFill>
+                <a:latin typeface="Arial"/>
+              </a:rPr>
+              <a:t>câu</a:t>
+            </a:r>
+            <a:r>
+              <a:rPr sz="1400" b="0" dirty="0">
+                <a:solidFill>
+                  <a:srgbClr val="333333"/>
+                </a:solidFill>
+                <a:latin typeface="Arial"/>
+              </a:rPr>
+              <a:t>: «</a:t>
+            </a:r>
+            <a:r>
+              <a:rPr sz="1400" b="0" dirty="0" err="1">
+                <a:solidFill>
+                  <a:srgbClr val="333333"/>
+                </a:solidFill>
+                <a:latin typeface="Arial"/>
+              </a:rPr>
+              <a:t>g_θ</a:t>
+            </a:r>
+            <a:r>
+              <a:rPr sz="1400" b="0" dirty="0">
+                <a:solidFill>
+                  <a:srgbClr val="333333"/>
+                </a:solidFill>
+                <a:latin typeface="Arial"/>
+              </a:rPr>
+              <a:t>(S) ≥ </a:t>
+            </a:r>
+            <a:r>
+              <a:rPr sz="1400" b="0" dirty="0" err="1">
+                <a:solidFill>
+                  <a:srgbClr val="333333"/>
+                </a:solidFill>
+                <a:latin typeface="Arial"/>
+              </a:rPr>
+              <a:t>tau_q</a:t>
+            </a:r>
+            <a:r>
+              <a:rPr sz="1400" b="0" dirty="0">
+                <a:solidFill>
+                  <a:srgbClr val="333333"/>
+                </a:solidFill>
+                <a:latin typeface="Arial"/>
+              </a:rPr>
+              <a:t> ?».  </a:t>
+            </a:r>
+            <a:r>
+              <a:rPr sz="1400" b="0" dirty="0" err="1">
+                <a:solidFill>
+                  <a:srgbClr val="333333"/>
+                </a:solidFill>
+                <a:latin typeface="Arial"/>
+              </a:rPr>
+              <a:t>Nên</a:t>
+            </a:r>
+            <a:r>
+              <a:rPr sz="1400" b="0" dirty="0">
+                <a:solidFill>
+                  <a:srgbClr val="333333"/>
+                </a:solidFill>
+                <a:latin typeface="Arial"/>
+              </a:rPr>
+              <a:t> </a:t>
+            </a:r>
+            <a:r>
+              <a:rPr sz="1400" b="0" dirty="0" err="1">
+                <a:solidFill>
+                  <a:srgbClr val="333333"/>
+                </a:solidFill>
+                <a:latin typeface="Arial"/>
+              </a:rPr>
+              <a:t>nó</a:t>
+            </a:r>
+            <a:r>
+              <a:rPr sz="1400" b="0" dirty="0">
+                <a:solidFill>
+                  <a:srgbClr val="333333"/>
+                </a:solidFill>
+                <a:latin typeface="Arial"/>
+              </a:rPr>
+              <a:t> </a:t>
+            </a:r>
+            <a:r>
+              <a:rPr sz="1400" b="0" dirty="0" err="1">
+                <a:solidFill>
+                  <a:srgbClr val="333333"/>
+                </a:solidFill>
+                <a:latin typeface="Arial"/>
+              </a:rPr>
+              <a:t>là</a:t>
+            </a:r>
+            <a:r>
+              <a:rPr sz="1400" b="0" dirty="0">
+                <a:solidFill>
+                  <a:srgbClr val="333333"/>
+                </a:solidFill>
+                <a:latin typeface="Arial"/>
+              </a:rPr>
+              <a:t> </a:t>
+            </a:r>
+            <a:r>
+              <a:rPr sz="1400" b="0" dirty="0" err="1">
+                <a:solidFill>
+                  <a:srgbClr val="333333"/>
+                </a:solidFill>
+                <a:latin typeface="Arial"/>
+              </a:rPr>
+              <a:t>bộ</a:t>
+            </a:r>
+            <a:r>
+              <a:rPr sz="1400" b="0" dirty="0">
+                <a:solidFill>
+                  <a:srgbClr val="333333"/>
+                </a:solidFill>
+                <a:latin typeface="Arial"/>
+              </a:rPr>
+              <a:t> </a:t>
+            </a:r>
+            <a:r>
+              <a:rPr sz="1400" b="0" dirty="0" err="1">
+                <a:solidFill>
+                  <a:srgbClr val="333333"/>
+                </a:solidFill>
+                <a:latin typeface="Arial"/>
+              </a:rPr>
+              <a:t>phân</a:t>
+            </a:r>
+            <a:r>
+              <a:rPr sz="1400" b="0" dirty="0">
+                <a:solidFill>
+                  <a:srgbClr val="333333"/>
+                </a:solidFill>
+                <a:latin typeface="Arial"/>
+              </a:rPr>
+              <a:t> </a:t>
+            </a:r>
+            <a:r>
+              <a:rPr sz="1400" b="0" dirty="0" err="1">
+                <a:solidFill>
+                  <a:srgbClr val="333333"/>
+                </a:solidFill>
+                <a:latin typeface="Arial"/>
+              </a:rPr>
+              <a:t>loại</a:t>
+            </a:r>
+            <a:r>
+              <a:rPr sz="1400" b="0" dirty="0">
+                <a:solidFill>
+                  <a:srgbClr val="333333"/>
+                </a:solidFill>
+                <a:latin typeface="Arial"/>
+              </a:rPr>
+              <a:t> ở </a:t>
+            </a:r>
+            <a:r>
+              <a:rPr sz="1400" b="0" dirty="0" err="1">
+                <a:solidFill>
+                  <a:srgbClr val="333333"/>
+                </a:solidFill>
+                <a:latin typeface="Arial"/>
+              </a:rPr>
+              <a:t>biên</a:t>
+            </a:r>
+            <a:r>
+              <a:rPr sz="1400" b="0" dirty="0">
+                <a:solidFill>
+                  <a:srgbClr val="333333"/>
+                </a:solidFill>
+                <a:latin typeface="Arial"/>
+              </a:rPr>
+              <a:t>, </a:t>
+            </a:r>
+            <a:r>
+              <a:rPr sz="1400" b="0" dirty="0" err="1">
+                <a:solidFill>
+                  <a:srgbClr val="333333"/>
+                </a:solidFill>
+                <a:latin typeface="Arial"/>
+              </a:rPr>
+              <a:t>không</a:t>
+            </a:r>
+            <a:r>
+              <a:rPr sz="1400" b="0" dirty="0">
+                <a:solidFill>
+                  <a:srgbClr val="333333"/>
+                </a:solidFill>
+                <a:latin typeface="Arial"/>
+              </a:rPr>
+              <a:t> </a:t>
+            </a:r>
+            <a:r>
+              <a:rPr sz="1400" b="0" dirty="0" err="1">
+                <a:solidFill>
+                  <a:srgbClr val="333333"/>
+                </a:solidFill>
+                <a:latin typeface="Arial"/>
+              </a:rPr>
+              <a:t>phải</a:t>
+            </a:r>
+            <a:r>
+              <a:rPr sz="1400" b="0" dirty="0">
+                <a:solidFill>
+                  <a:srgbClr val="333333"/>
+                </a:solidFill>
+                <a:latin typeface="Arial"/>
+              </a:rPr>
+              <a:t> </a:t>
+            </a:r>
+            <a:r>
+              <a:rPr sz="1400" b="0" dirty="0" err="1">
+                <a:solidFill>
+                  <a:srgbClr val="333333"/>
+                </a:solidFill>
+                <a:latin typeface="Arial"/>
+              </a:rPr>
+              <a:t>bộ</a:t>
+            </a:r>
+            <a:r>
+              <a:rPr sz="1400" b="0" dirty="0">
+                <a:solidFill>
+                  <a:srgbClr val="333333"/>
+                </a:solidFill>
+                <a:latin typeface="Arial"/>
+              </a:rPr>
+              <a:t> </a:t>
+            </a:r>
+            <a:r>
+              <a:rPr sz="1400" b="0" dirty="0" err="1">
+                <a:solidFill>
+                  <a:srgbClr val="333333"/>
+                </a:solidFill>
+                <a:latin typeface="Arial"/>
+              </a:rPr>
+              <a:t>hồi</a:t>
+            </a:r>
+            <a:r>
+              <a:rPr sz="1400" b="0" dirty="0">
+                <a:solidFill>
+                  <a:srgbClr val="333333"/>
+                </a:solidFill>
+                <a:latin typeface="Arial"/>
+              </a:rPr>
+              <a:t> </a:t>
+            </a:r>
+            <a:r>
+              <a:rPr sz="1400" b="0" dirty="0" err="1">
+                <a:solidFill>
+                  <a:srgbClr val="333333"/>
+                </a:solidFill>
+                <a:latin typeface="Arial"/>
+              </a:rPr>
+              <a:t>quy</a:t>
+            </a:r>
+            <a:endParaRPr sz="1400" b="0" dirty="0">
+              <a:solidFill>
+                <a:srgbClr val="333333"/>
+              </a:solidFill>
+              <a:latin typeface="Arial"/>
+            </a:endParaRPr>
           </a:p>
           <a:p>
             <a:pPr algn="l">
@@ -44829,13 +46222,337 @@
               </a:spcAft>
             </a:pPr>
             <a:r>
-              <a:rPr sz="1400" b="0">
-                <a:solidFill>
-                  <a:srgbClr val="333333"/>
-                </a:solidFill>
-                <a:latin typeface="Arial"/>
-              </a:rPr>
-              <a:t>— và lấy mẫu phải dồn vào biên. Cặp đôi ngẫu nhiên hay tập con đều rơi xa ngưỡng: negative dễ, vô dụng.</a:t>
+              <a:rPr sz="1400" b="0" dirty="0">
+                <a:solidFill>
+                  <a:srgbClr val="333333"/>
+                </a:solidFill>
+                <a:latin typeface="Arial"/>
+              </a:rPr>
+              <a:t>— </a:t>
+            </a:r>
+            <a:r>
+              <a:rPr sz="1400" b="0" dirty="0" err="1">
+                <a:solidFill>
+                  <a:srgbClr val="333333"/>
+                </a:solidFill>
+                <a:latin typeface="Arial"/>
+              </a:rPr>
+              <a:t>và</a:t>
+            </a:r>
+            <a:r>
+              <a:rPr sz="1400" b="0" dirty="0">
+                <a:solidFill>
+                  <a:srgbClr val="333333"/>
+                </a:solidFill>
+                <a:latin typeface="Arial"/>
+              </a:rPr>
+              <a:t> </a:t>
+            </a:r>
+            <a:r>
+              <a:rPr sz="1400" b="0" dirty="0" err="1">
+                <a:solidFill>
+                  <a:srgbClr val="333333"/>
+                </a:solidFill>
+                <a:latin typeface="Arial"/>
+              </a:rPr>
+              <a:t>lấy</a:t>
+            </a:r>
+            <a:r>
+              <a:rPr sz="1400" b="0" dirty="0">
+                <a:solidFill>
+                  <a:srgbClr val="333333"/>
+                </a:solidFill>
+                <a:latin typeface="Arial"/>
+              </a:rPr>
+              <a:t> </a:t>
+            </a:r>
+            <a:r>
+              <a:rPr sz="1400" b="0" dirty="0" err="1">
+                <a:solidFill>
+                  <a:srgbClr val="333333"/>
+                </a:solidFill>
+                <a:latin typeface="Arial"/>
+              </a:rPr>
+              <a:t>mẫu</a:t>
+            </a:r>
+            <a:r>
+              <a:rPr sz="1400" b="0" dirty="0">
+                <a:solidFill>
+                  <a:srgbClr val="333333"/>
+                </a:solidFill>
+                <a:latin typeface="Arial"/>
+              </a:rPr>
+              <a:t> </a:t>
+            </a:r>
+            <a:r>
+              <a:rPr sz="1400" b="0" dirty="0" err="1">
+                <a:solidFill>
+                  <a:srgbClr val="333333"/>
+                </a:solidFill>
+                <a:latin typeface="Arial"/>
+              </a:rPr>
+              <a:t>phải</a:t>
+            </a:r>
+            <a:r>
+              <a:rPr sz="1400" b="0" dirty="0">
+                <a:solidFill>
+                  <a:srgbClr val="333333"/>
+                </a:solidFill>
+                <a:latin typeface="Arial"/>
+              </a:rPr>
+              <a:t> </a:t>
+            </a:r>
+            <a:r>
+              <a:rPr sz="1400" b="0" dirty="0" err="1">
+                <a:solidFill>
+                  <a:srgbClr val="333333"/>
+                </a:solidFill>
+                <a:latin typeface="Arial"/>
+              </a:rPr>
+              <a:t>dồn</a:t>
+            </a:r>
+            <a:r>
+              <a:rPr sz="1400" b="0" dirty="0">
+                <a:solidFill>
+                  <a:srgbClr val="333333"/>
+                </a:solidFill>
+                <a:latin typeface="Arial"/>
+              </a:rPr>
+              <a:t> </a:t>
+            </a:r>
+            <a:r>
+              <a:rPr sz="1400" b="0" dirty="0" err="1">
+                <a:solidFill>
+                  <a:srgbClr val="333333"/>
+                </a:solidFill>
+                <a:latin typeface="Arial"/>
+              </a:rPr>
+              <a:t>vào</a:t>
+            </a:r>
+            <a:r>
+              <a:rPr sz="1400" b="0" dirty="0">
+                <a:solidFill>
+                  <a:srgbClr val="333333"/>
+                </a:solidFill>
+                <a:latin typeface="Arial"/>
+              </a:rPr>
+              <a:t> </a:t>
+            </a:r>
+            <a:r>
+              <a:rPr sz="1400" b="0" dirty="0" err="1">
+                <a:solidFill>
+                  <a:srgbClr val="333333"/>
+                </a:solidFill>
+                <a:latin typeface="Arial"/>
+              </a:rPr>
+              <a:t>biên</a:t>
+            </a:r>
+            <a:r>
+              <a:rPr sz="1400" b="0" dirty="0">
+                <a:solidFill>
+                  <a:srgbClr val="333333"/>
+                </a:solidFill>
+                <a:latin typeface="Arial"/>
+              </a:rPr>
+              <a:t>. </a:t>
+            </a:r>
+            <a:r>
+              <a:rPr sz="1400" b="0" dirty="0" err="1">
+                <a:solidFill>
+                  <a:srgbClr val="333333"/>
+                </a:solidFill>
+                <a:latin typeface="Arial"/>
+              </a:rPr>
+              <a:t>Cặp</a:t>
+            </a:r>
+            <a:r>
+              <a:rPr sz="1400" b="0" dirty="0">
+                <a:solidFill>
+                  <a:srgbClr val="333333"/>
+                </a:solidFill>
+                <a:latin typeface="Arial"/>
+              </a:rPr>
+              <a:t> </a:t>
+            </a:r>
+            <a:r>
+              <a:rPr sz="1400" b="0" dirty="0" err="1">
+                <a:solidFill>
+                  <a:srgbClr val="333333"/>
+                </a:solidFill>
+                <a:latin typeface="Arial"/>
+              </a:rPr>
+              <a:t>đôi</a:t>
+            </a:r>
+            <a:r>
+              <a:rPr sz="1400" b="0" dirty="0">
+                <a:solidFill>
+                  <a:srgbClr val="333333"/>
+                </a:solidFill>
+                <a:latin typeface="Arial"/>
+              </a:rPr>
+              <a:t> </a:t>
+            </a:r>
+            <a:r>
+              <a:rPr sz="1400" b="0" dirty="0" err="1">
+                <a:solidFill>
+                  <a:srgbClr val="333333"/>
+                </a:solidFill>
+                <a:latin typeface="Arial"/>
+              </a:rPr>
+              <a:t>ngẫu</a:t>
+            </a:r>
+            <a:r>
+              <a:rPr sz="1400" b="0" dirty="0">
+                <a:solidFill>
+                  <a:srgbClr val="333333"/>
+                </a:solidFill>
+                <a:latin typeface="Arial"/>
+              </a:rPr>
+              <a:t> </a:t>
+            </a:r>
+            <a:r>
+              <a:rPr sz="1400" b="0" dirty="0" err="1">
+                <a:solidFill>
+                  <a:srgbClr val="333333"/>
+                </a:solidFill>
+                <a:latin typeface="Arial"/>
+              </a:rPr>
+              <a:t>nhiên</a:t>
+            </a:r>
+            <a:r>
+              <a:rPr sz="1400" b="0" dirty="0">
+                <a:solidFill>
+                  <a:srgbClr val="333333"/>
+                </a:solidFill>
+                <a:latin typeface="Arial"/>
+              </a:rPr>
+              <a:t> hay </a:t>
+            </a:r>
+            <a:r>
+              <a:rPr sz="1400" b="0" dirty="0" err="1">
+                <a:solidFill>
+                  <a:srgbClr val="333333"/>
+                </a:solidFill>
+                <a:latin typeface="Arial"/>
+              </a:rPr>
+              <a:t>tập</a:t>
+            </a:r>
+            <a:r>
+              <a:rPr sz="1400" b="0" dirty="0">
+                <a:solidFill>
+                  <a:srgbClr val="333333"/>
+                </a:solidFill>
+                <a:latin typeface="Arial"/>
+              </a:rPr>
+              <a:t> con </a:t>
+            </a:r>
+            <a:r>
+              <a:rPr sz="1400" b="0" dirty="0" err="1">
+                <a:solidFill>
+                  <a:srgbClr val="333333"/>
+                </a:solidFill>
+                <a:latin typeface="Arial"/>
+              </a:rPr>
+              <a:t>đều</a:t>
+            </a:r>
+            <a:r>
+              <a:rPr sz="1400" b="0" dirty="0">
+                <a:solidFill>
+                  <a:srgbClr val="333333"/>
+                </a:solidFill>
+                <a:latin typeface="Arial"/>
+              </a:rPr>
+              <a:t> </a:t>
+            </a:r>
+            <a:r>
+              <a:rPr sz="1400" b="0" dirty="0" err="1">
+                <a:solidFill>
+                  <a:srgbClr val="333333"/>
+                </a:solidFill>
+                <a:latin typeface="Arial"/>
+              </a:rPr>
+              <a:t>rơi</a:t>
+            </a:r>
+            <a:r>
+              <a:rPr sz="1400" b="0" dirty="0">
+                <a:solidFill>
+                  <a:srgbClr val="333333"/>
+                </a:solidFill>
+                <a:latin typeface="Arial"/>
+              </a:rPr>
+              <a:t> xa </a:t>
+            </a:r>
+            <a:r>
+              <a:rPr sz="1400" b="0" dirty="0" err="1">
+                <a:solidFill>
+                  <a:srgbClr val="333333"/>
+                </a:solidFill>
+                <a:latin typeface="Arial"/>
+              </a:rPr>
+              <a:t>ngưỡng</a:t>
+            </a:r>
+            <a:r>
+              <a:rPr sz="1400" b="0" dirty="0">
+                <a:solidFill>
+                  <a:srgbClr val="333333"/>
+                </a:solidFill>
+                <a:latin typeface="Arial"/>
+              </a:rPr>
+              <a:t>: negative </a:t>
+            </a:r>
+            <a:r>
+              <a:rPr sz="1400" b="0" dirty="0" err="1">
+                <a:solidFill>
+                  <a:srgbClr val="333333"/>
+                </a:solidFill>
+                <a:latin typeface="Arial"/>
+              </a:rPr>
+              <a:t>dễ</a:t>
+            </a:r>
+            <a:r>
+              <a:rPr sz="1400" b="0" dirty="0">
+                <a:solidFill>
+                  <a:srgbClr val="333333"/>
+                </a:solidFill>
+                <a:latin typeface="Arial"/>
+              </a:rPr>
+              <a:t>, </a:t>
+            </a:r>
+            <a:r>
+              <a:rPr sz="1400" b="0" dirty="0" err="1">
+                <a:solidFill>
+                  <a:srgbClr val="333333"/>
+                </a:solidFill>
+                <a:latin typeface="Arial"/>
+              </a:rPr>
+              <a:t>vô</a:t>
+            </a:r>
+            <a:r>
+              <a:rPr sz="1400" b="0" dirty="0">
+                <a:solidFill>
+                  <a:srgbClr val="333333"/>
+                </a:solidFill>
+                <a:latin typeface="Arial"/>
+              </a:rPr>
+              <a:t> </a:t>
+            </a:r>
+            <a:r>
+              <a:rPr sz="1400" b="0" dirty="0" err="1">
+                <a:solidFill>
+                  <a:srgbClr val="333333"/>
+                </a:solidFill>
+                <a:latin typeface="Arial"/>
+              </a:rPr>
+              <a:t>dụng</a:t>
+            </a:r>
+            <a:r>
+              <a:rPr sz="1400" b="0" dirty="0">
+                <a:solidFill>
+                  <a:srgbClr val="333333"/>
+                </a:solidFill>
+                <a:latin typeface="Arial"/>
+              </a:rPr>
+              <a:t>.</a:t>
             </a:r>
           </a:p>
         </p:txBody>
@@ -44883,6 +46600,7 @@
           <a:lstStyle/>
           <a:p>
             <a:pPr algn="ctr"/>
+            <a:endParaRPr/>
           </a:p>
         </p:txBody>
       </p:sp>
@@ -44903,7 +46621,7 @@
           <a:noFill/>
         </p:spPr>
         <p:txBody>
-          <a:bodyPr wrap="square" anchor="ctr" lIns="54864" rIns="54864" tIns="18288" bIns="18288">
+          <a:bodyPr wrap="square" lIns="54864" tIns="18288" rIns="54864" bIns="18288" anchor="ctr">
             <a:spAutoFit/>
           </a:bodyPr>
           <a:lstStyle/>
@@ -44942,7 +46660,7 @@
           <a:noFill/>
         </p:spPr>
         <p:txBody>
-          <a:bodyPr wrap="square" anchor="ctr" lIns="54864" rIns="54864" tIns="18288" bIns="18288">
+          <a:bodyPr wrap="square" lIns="54864" tIns="18288" rIns="54864" bIns="18288" anchor="ctr">
             <a:spAutoFit/>
           </a:bodyPr>
           <a:lstStyle/>
@@ -44981,7 +46699,7 @@
           <a:noFill/>
         </p:spPr>
         <p:txBody>
-          <a:bodyPr wrap="square" anchor="ctr" lIns="54864" rIns="54864" tIns="18288" bIns="18288">
+          <a:bodyPr wrap="square" lIns="54864" tIns="18288" rIns="54864" bIns="18288" anchor="ctr">
             <a:spAutoFit/>
           </a:bodyPr>
           <a:lstStyle/>
@@ -45020,7 +46738,7 @@
           <a:noFill/>
         </p:spPr>
         <p:txBody>
-          <a:bodyPr wrap="square" anchor="ctr" lIns="54864" rIns="54864" tIns="18288" bIns="18288">
+          <a:bodyPr wrap="square" lIns="54864" tIns="18288" rIns="54864" bIns="18288" anchor="ctr">
             <a:spAutoFit/>
           </a:bodyPr>
           <a:lstStyle/>
@@ -45085,6 +46803,7 @@
           <a:lstStyle/>
           <a:p>
             <a:pPr algn="ctr"/>
+            <a:endParaRPr/>
           </a:p>
         </p:txBody>
       </p:sp>
@@ -45105,7 +46824,7 @@
           <a:noFill/>
         </p:spPr>
         <p:txBody>
-          <a:bodyPr wrap="square" anchor="ctr" lIns="54864" rIns="54864" tIns="18288" bIns="18288">
+          <a:bodyPr wrap="square" lIns="54864" tIns="18288" rIns="54864" bIns="18288" anchor="ctr">
             <a:spAutoFit/>
           </a:bodyPr>
           <a:lstStyle/>
@@ -45144,7 +46863,7 @@
           <a:noFill/>
         </p:spPr>
         <p:txBody>
-          <a:bodyPr wrap="square" anchor="ctr" lIns="54864" rIns="54864" tIns="18288" bIns="18288">
+          <a:bodyPr wrap="square" lIns="54864" tIns="18288" rIns="54864" bIns="18288" anchor="ctr">
             <a:spAutoFit/>
           </a:bodyPr>
           <a:lstStyle/>
@@ -45183,7 +46902,7 @@
           <a:noFill/>
         </p:spPr>
         <p:txBody>
-          <a:bodyPr wrap="square" anchor="ctr" lIns="54864" rIns="54864" tIns="18288" bIns="18288">
+          <a:bodyPr wrap="square" lIns="54864" tIns="18288" rIns="54864" bIns="18288" anchor="ctr">
             <a:spAutoFit/>
           </a:bodyPr>
           <a:lstStyle/>
@@ -45222,7 +46941,7 @@
           <a:noFill/>
         </p:spPr>
         <p:txBody>
-          <a:bodyPr wrap="square" anchor="ctr" lIns="54864" rIns="54864" tIns="18288" bIns="18288">
+          <a:bodyPr wrap="square" lIns="54864" tIns="18288" rIns="54864" bIns="18288" anchor="ctr">
             <a:spAutoFit/>
           </a:bodyPr>
           <a:lstStyle/>
@@ -45287,6 +47006,7 @@
           <a:lstStyle/>
           <a:p>
             <a:pPr algn="ctr"/>
+            <a:endParaRPr/>
           </a:p>
         </p:txBody>
       </p:sp>
@@ -45307,7 +47027,7 @@
           <a:noFill/>
         </p:spPr>
         <p:txBody>
-          <a:bodyPr wrap="square" anchor="ctr" lIns="54864" rIns="54864" tIns="18288" bIns="18288">
+          <a:bodyPr wrap="square" lIns="54864" tIns="18288" rIns="54864" bIns="18288" anchor="ctr">
             <a:spAutoFit/>
           </a:bodyPr>
           <a:lstStyle/>
@@ -45346,7 +47066,7 @@
           <a:noFill/>
         </p:spPr>
         <p:txBody>
-          <a:bodyPr wrap="square" anchor="ctr" lIns="54864" rIns="54864" tIns="18288" bIns="18288">
+          <a:bodyPr wrap="square" lIns="54864" tIns="18288" rIns="54864" bIns="18288" anchor="ctr">
             <a:spAutoFit/>
           </a:bodyPr>
           <a:lstStyle/>
@@ -45385,7 +47105,7 @@
           <a:noFill/>
         </p:spPr>
         <p:txBody>
-          <a:bodyPr wrap="square" anchor="ctr" lIns="54864" rIns="54864" tIns="18288" bIns="18288">
+          <a:bodyPr wrap="square" lIns="54864" tIns="18288" rIns="54864" bIns="18288" anchor="ctr">
             <a:spAutoFit/>
           </a:bodyPr>
           <a:lstStyle/>
@@ -45424,7 +47144,7 @@
           <a:noFill/>
         </p:spPr>
         <p:txBody>
-          <a:bodyPr wrap="square" anchor="ctr" lIns="54864" rIns="54864" tIns="18288" bIns="18288">
+          <a:bodyPr wrap="square" lIns="54864" tIns="18288" rIns="54864" bIns="18288" anchor="ctr">
             <a:spAutoFit/>
           </a:bodyPr>
           <a:lstStyle/>
@@ -45489,6 +47209,7 @@
           <a:lstStyle/>
           <a:p>
             <a:pPr algn="ctr"/>
+            <a:endParaRPr/>
           </a:p>
         </p:txBody>
       </p:sp>
@@ -45509,7 +47230,7 @@
           <a:noFill/>
         </p:spPr>
         <p:txBody>
-          <a:bodyPr wrap="square" anchor="ctr" lIns="54864" rIns="54864" tIns="18288" bIns="18288">
+          <a:bodyPr wrap="square" lIns="54864" tIns="18288" rIns="54864" bIns="18288" anchor="ctr">
             <a:spAutoFit/>
           </a:bodyPr>
           <a:lstStyle/>
@@ -45548,7 +47269,7 @@
           <a:noFill/>
         </p:spPr>
         <p:txBody>
-          <a:bodyPr wrap="square" anchor="ctr" lIns="54864" rIns="54864" tIns="18288" bIns="18288">
+          <a:bodyPr wrap="square" lIns="54864" tIns="18288" rIns="54864" bIns="18288" anchor="ctr">
             <a:spAutoFit/>
           </a:bodyPr>
           <a:lstStyle/>
@@ -45587,7 +47308,7 @@
           <a:noFill/>
         </p:spPr>
         <p:txBody>
-          <a:bodyPr wrap="square" anchor="ctr" lIns="54864" rIns="54864" tIns="18288" bIns="18288">
+          <a:bodyPr wrap="square" lIns="54864" tIns="18288" rIns="54864" bIns="18288" anchor="ctr">
             <a:spAutoFit/>
           </a:bodyPr>
           <a:lstStyle/>
@@ -45626,7 +47347,7 @@
           <a:noFill/>
         </p:spPr>
         <p:txBody>
-          <a:bodyPr wrap="square" anchor="ctr" lIns="54864" rIns="54864" tIns="18288" bIns="18288">
+          <a:bodyPr wrap="square" lIns="54864" tIns="18288" rIns="54864" bIns="18288" anchor="ctr">
             <a:spAutoFit/>
           </a:bodyPr>
           <a:lstStyle/>
@@ -45691,6 +47412,7 @@
           <a:lstStyle/>
           <a:p>
             <a:pPr algn="ctr"/>
+            <a:endParaRPr/>
           </a:p>
         </p:txBody>
       </p:sp>
@@ -45737,6 +47459,7 @@
           <a:lstStyle/>
           <a:p>
             <a:pPr algn="ctr"/>
+            <a:endParaRPr/>
           </a:p>
         </p:txBody>
       </p:sp>
@@ -45781,164 +47504,7 @@
           <a:lstStyle/>
           <a:p>
             <a:pPr algn="ctr"/>
-          </a:p>
-        </p:txBody>
-      </p:sp>
-      <p:sp>
-        <p:nvSpPr>
-          <p:cNvPr id="30" name="TextBox 29"/>
-          <p:cNvSpPr txBox="1"/>
-          <p:nvPr/>
-        </p:nvSpPr>
-        <p:spPr>
-          <a:xfrm>
-            <a:off x="676656" y="3785615"/>
-            <a:ext cx="5257800" cy="292608"/>
-          </a:xfrm>
-          <a:prstGeom prst="rect">
-            <a:avLst/>
-          </a:prstGeom>
-          <a:noFill/>
-        </p:spPr>
-        <p:txBody>
-          <a:bodyPr wrap="square" anchor="ctr" lIns="54864" rIns="54864" tIns="18288" bIns="18288">
-            <a:spAutoFit/>
-          </a:bodyPr>
-          <a:lstStyle/>
-          <a:p>
-            <a:pPr algn="l">
-              <a:spcAft>
-                <a:spcPts val="200"/>
-              </a:spcAft>
-            </a:pPr>
-            <a:r>
-              <a:rPr sz="1500" b="1">
-                <a:solidFill>
-                  <a:srgbClr val="FFFFFF"/>
-                </a:solidFill>
-                <a:latin typeface="Arial"/>
-              </a:rPr>
-              <a:t>r là kết quả, không phải núm vặn</a:t>
-            </a:r>
-          </a:p>
-        </p:txBody>
-      </p:sp>
-      <p:sp>
-        <p:nvSpPr>
-          <p:cNvPr id="31" name="TextBox 30"/>
-          <p:cNvSpPr txBox="1"/>
-          <p:nvPr/>
-        </p:nvSpPr>
-        <p:spPr>
-          <a:xfrm>
-            <a:off x="749808" y="4151376"/>
-            <a:ext cx="5120640" cy="1335024"/>
-          </a:xfrm>
-          <a:prstGeom prst="rect">
-            <a:avLst/>
-          </a:prstGeom>
-          <a:noFill/>
-        </p:spPr>
-        <p:txBody>
-          <a:bodyPr wrap="square" anchor="t" lIns="54864" rIns="54864" tIns="18288" bIns="18288">
-            <a:spAutoFit/>
-          </a:bodyPr>
-          <a:lstStyle/>
-          <a:p>
-            <a:pPr algn="l">
-              <a:spcAft>
-                <a:spcPts val="200"/>
-              </a:spcAft>
-            </a:pPr>
-            <a:r>
-              <a:rPr sz="1200" b="0">
-                <a:solidFill>
-                  <a:srgbClr val="333333"/>
-                </a:solidFill>
-                <a:latin typeface="Arial"/>
-              </a:rPr>
-              <a:t>Greedy thêm một đoạn mỗi vòng tới khi vượt tau_q,</a:t>
-            </a:r>
-          </a:p>
-          <a:p>
-            <a:pPr algn="l">
-              <a:spcAft>
-                <a:spcPts val="200"/>
-              </a:spcAft>
-            </a:pPr>
-            <a:r>
-              <a:rPr sz="1200" b="0">
-                <a:solidFill>
-                  <a:srgbClr val="333333"/>
-                </a:solidFill>
-                <a:latin typeface="Arial"/>
-              </a:rPr>
-              <a:t>nên  r = |S| lúc dừng  =  cỡ tập đủ tìm được.</a:t>
-            </a:r>
-          </a:p>
-          <a:p>
-            <a:pPr algn="l">
-              <a:spcAft>
-                <a:spcPts val="200"/>
-              </a:spcAft>
-            </a:pPr>
-            <a:r>
-              <a:rPr sz="1200" b="0">
-                <a:solidFill>
-                  <a:srgbClr val="333333"/>
-                </a:solidFill>
-                <a:latin typeface="Arial"/>
-              </a:rPr>
-              <a:t>2-hop → r = 2.   r = 3 chỉ là ước lượng tính tiền.</a:t>
-            </a:r>
-          </a:p>
-          <a:p>
-            <a:pPr algn="l">
-              <a:spcAft>
-                <a:spcPts val="200"/>
-              </a:spcAft>
-            </a:pPr>
-            <a:r>
-              <a:rPr sz="1200" b="0">
-                <a:solidFill>
-                  <a:srgbClr val="333333"/>
-                </a:solidFill>
-                <a:latin typeface="Arial"/>
-              </a:rPr>
-              <a:t/>
-            </a:r>
-          </a:p>
-          <a:p>
-            <a:pPr algn="l">
-              <a:spcAft>
-                <a:spcPts val="200"/>
-              </a:spcAft>
-            </a:pPr>
-            <a:r>
-              <a:rPr sz="1200" b="0">
-                <a:solidFill>
-                  <a:srgbClr val="333333"/>
-                </a:solidFill>
-                <a:latin typeface="Arial"/>
-              </a:rPr>
-              <a:t>Vòng greedy ĐẦU TIÊN miễn phí — nó chính là chấm</a:t>
-            </a:r>
-          </a:p>
-          <a:p>
-            <a:pPr algn="l">
-              <a:spcAft>
-                <a:spcPts val="200"/>
-              </a:spcAft>
-            </a:pPr>
-            <a:r>
-              <a:rPr sz="1200" b="0">
-                <a:solidFill>
-                  <a:srgbClr val="333333"/>
-                </a:solidFill>
-                <a:latin typeface="Arial"/>
-              </a:rPr>
-              <a:t>singleton. Chi phí = (r − 1)·m,  không phải r·m.</a:t>
-            </a:r>
+            <a:endParaRPr/>
           </a:p>
         </p:txBody>
       </p:sp>
@@ -45985,6 +47551,7 @@
           <a:lstStyle/>
           <a:p>
             <a:pPr algn="ctr"/>
+            <a:endParaRPr/>
           </a:p>
         </p:txBody>
       </p:sp>
@@ -46031,6 +47598,7 @@
           <a:lstStyle/>
           <a:p>
             <a:pPr algn="ctr"/>
+            <a:endParaRPr/>
           </a:p>
         </p:txBody>
       </p:sp>
@@ -46075,6 +47643,7 @@
           <a:lstStyle/>
           <a:p>
             <a:pPr algn="ctr"/>
+            <a:endParaRPr/>
           </a:p>
         </p:txBody>
       </p:sp>
@@ -46095,7 +47664,7 @@
           <a:noFill/>
         </p:spPr>
         <p:txBody>
-          <a:bodyPr wrap="square" anchor="ctr" lIns="54864" rIns="54864" tIns="18288" bIns="18288">
+          <a:bodyPr wrap="square" lIns="54864" tIns="18288" rIns="54864" bIns="18288" anchor="ctr">
             <a:spAutoFit/>
           </a:bodyPr>
           <a:lstStyle/>
@@ -46134,7 +47703,7 @@
           <a:noFill/>
         </p:spPr>
         <p:txBody>
-          <a:bodyPr wrap="square" anchor="t" lIns="54864" rIns="54864" tIns="18288" bIns="18288">
+          <a:bodyPr wrap="square" lIns="54864" tIns="18288" rIns="54864" bIns="18288" anchor="t">
             <a:spAutoFit/>
           </a:bodyPr>
           <a:lstStyle/>
@@ -46176,15 +47745,12 @@
                 <a:spcPts val="200"/>
               </a:spcAft>
             </a:pPr>
-            <a:r>
-              <a:rPr sz="1200" b="0">
-                <a:solidFill>
-                  <a:srgbClr val="333333"/>
-                </a:solidFill>
-                <a:latin typeface="Arial"/>
-              </a:rPr>
-              <a:t/>
-            </a:r>
+            <a:endParaRPr sz="1200" b="0">
+              <a:solidFill>
+                <a:srgbClr val="333333"/>
+              </a:solidFill>
+              <a:latin typeface="Arial"/>
+            </a:endParaRPr>
           </a:p>
           <a:p>
             <a:pPr algn="l">
@@ -46279,6 +47845,7 @@
           <a:lstStyle/>
           <a:p>
             <a:pPr algn="ctr"/>
+            <a:endParaRPr/>
           </a:p>
         </p:txBody>
       </p:sp>
@@ -46325,6 +47892,7 @@
           <a:lstStyle/>
           <a:p>
             <a:pPr algn="ctr"/>
+            <a:endParaRPr/>
           </a:p>
         </p:txBody>
       </p:sp>
@@ -46369,6 +47937,7 @@
           <a:lstStyle/>
           <a:p>
             <a:pPr algn="ctr"/>
+            <a:endParaRPr/>
           </a:p>
         </p:txBody>
       </p:sp>
@@ -46389,7 +47958,7 @@
           <a:noFill/>
         </p:spPr>
         <p:txBody>
-          <a:bodyPr wrap="square" anchor="ctr" lIns="54864" rIns="54864" tIns="18288" bIns="18288">
+          <a:bodyPr wrap="square" lIns="54864" tIns="18288" rIns="54864" bIns="18288" anchor="ctr">
             <a:spAutoFit/>
           </a:bodyPr>
           <a:lstStyle/>
@@ -46428,7 +47997,7 @@
           <a:noFill/>
         </p:spPr>
         <p:txBody>
-          <a:bodyPr wrap="square" anchor="ctr" lIns="54864" rIns="54864" tIns="18288" bIns="18288">
+          <a:bodyPr wrap="square" lIns="54864" tIns="18288" rIns="54864" bIns="18288" anchor="ctr">
             <a:spAutoFit/>
           </a:bodyPr>
           <a:lstStyle/>
@@ -46467,7 +48036,7 @@
           <a:noFill/>
         </p:spPr>
         <p:txBody>
-          <a:bodyPr wrap="square" anchor="t" lIns="54864" rIns="54864" tIns="18288" bIns="18288">
+          <a:bodyPr wrap="square" lIns="54864" tIns="18288" rIns="54864" bIns="18288" anchor="t">
             <a:spAutoFit/>
           </a:bodyPr>
           <a:lstStyle/>
@@ -46904,24 +48473,6 @@
               </a:rPr>
               <a:t>Beam search trên g_θ, 0 lượt LLM.</a:t>
             </a:r>
-            <a:r>
-              <a:rPr sz="1300" b="0" baseline="-25000">
-                <a:solidFill>
-                  <a:srgbClr val="333333"/>
-                </a:solidFill>
-                <a:latin typeface="Arial"/>
-              </a:rPr>
-              <a:t/>
-            </a:r>
-            <a:r>
-              <a:rPr sz="1300" b="0">
-                <a:solidFill>
-                  <a:srgbClr val="333333"/>
-                </a:solidFill>
-                <a:latin typeface="Arial"/>
-              </a:rPr>
-              <a:t/>
-            </a:r>
           </a:p>
           <a:p>
             <a:pPr algn="l">
@@ -49729,7 +51280,7 @@
 </file>
 
 <file path=ppt/slides/slide8.xml><?xml version="1.0" encoding="utf-8"?>
-<p:sld xmlns:a="http://schemas.openxmlformats.org/drawingml/2006/main" xmlns:p="http://schemas.openxmlformats.org/presentationml/2006/main" xmlns:r="http://schemas.openxmlformats.org/officeDocument/2006/relationships">
+<p:sld xmlns:a="http://schemas.openxmlformats.org/drawingml/2006/main" xmlns:r="http://schemas.openxmlformats.org/officeDocument/2006/relationships" xmlns:p="http://schemas.openxmlformats.org/presentationml/2006/main">
   <p:cSld>
     <p:spTree>
       <p:nvGrpSpPr>
@@ -49737,7 +51288,14 @@
         <p:cNvGrpSpPr/>
         <p:nvPr/>
       </p:nvGrpSpPr>
-      <p:grpSpPr/>
+      <p:grpSpPr>
+        <a:xfrm>
+          <a:off x="0" y="0"/>
+          <a:ext cx="0" cy="0"/>
+          <a:chOff x="0" y="0"/>
+          <a:chExt cx="0" cy="0"/>
+        </a:xfrm>
+      </p:grpSpPr>
       <p:sp>
         <p:nvSpPr>
           <p:cNvPr id="2" name="Rectangle 1"/>
@@ -49779,6 +51337,7 @@
           <a:lstStyle/>
           <a:p>
             <a:pPr algn="ctr"/>
+            <a:endParaRPr/>
           </a:p>
         </p:txBody>
       </p:sp>
@@ -49799,7 +51358,7 @@
           <a:noFill/>
         </p:spPr>
         <p:txBody>
-          <a:bodyPr wrap="square" lIns="54864" rIns="54864" tIns="18288" bIns="18288">
+          <a:bodyPr wrap="square" lIns="54864" tIns="18288" rIns="54864" bIns="18288">
             <a:spAutoFit/>
           </a:bodyPr>
           <a:lstStyle/>
@@ -49858,6 +51417,7 @@
           <a:lstStyle/>
           <a:p>
             <a:pPr algn="ctr"/>
+            <a:endParaRPr/>
           </a:p>
         </p:txBody>
       </p:sp>
@@ -49878,7 +51438,7 @@
           <a:noFill/>
         </p:spPr>
         <p:txBody>
-          <a:bodyPr wrap="square" lIns="54864" rIns="54864" tIns="18288" bIns="18288">
+          <a:bodyPr wrap="square" lIns="54864" tIns="18288" rIns="54864" bIns="18288">
             <a:spAutoFit/>
           </a:bodyPr>
           <a:lstStyle/>
@@ -49913,7 +51473,7 @@
           <a:noFill/>
         </p:spPr>
         <p:txBody>
-          <a:bodyPr wrap="square" lIns="54864" rIns="54864" tIns="18288" bIns="18288">
+          <a:bodyPr wrap="square" lIns="54864" tIns="18288" rIns="54864" bIns="18288">
             <a:spAutoFit/>
           </a:bodyPr>
           <a:lstStyle/>
@@ -49948,7 +51508,7 @@
           <a:noFill/>
         </p:spPr>
         <p:txBody>
-          <a:bodyPr wrap="square" lIns="54864" rIns="54864" tIns="18288" bIns="18288">
+          <a:bodyPr wrap="square" lIns="54864" tIns="18288" rIns="54864" bIns="18288">
             <a:spAutoFit/>
           </a:bodyPr>
           <a:lstStyle/>
@@ -50009,6 +51569,7 @@
           <a:lstStyle/>
           <a:p>
             <a:pPr algn="ctr"/>
+            <a:endParaRPr/>
           </a:p>
         </p:txBody>
       </p:sp>
@@ -50055,6 +51616,7 @@
           <a:lstStyle/>
           <a:p>
             <a:pPr algn="ctr"/>
+            <a:endParaRPr/>
           </a:p>
         </p:txBody>
       </p:sp>
@@ -50099,6 +51661,7 @@
           <a:lstStyle/>
           <a:p>
             <a:pPr algn="ctr"/>
+            <a:endParaRPr/>
           </a:p>
         </p:txBody>
       </p:sp>
@@ -50119,7 +51682,7 @@
           <a:noFill/>
         </p:spPr>
         <p:txBody>
-          <a:bodyPr wrap="square" lIns="54864" rIns="54864" tIns="18288" bIns="18288">
+          <a:bodyPr wrap="square" lIns="54864" tIns="18288" rIns="54864" bIns="18288">
             <a:spAutoFit/>
           </a:bodyPr>
           <a:lstStyle/>
@@ -50154,7 +51717,7 @@
           <a:noFill/>
         </p:spPr>
         <p:txBody>
-          <a:bodyPr wrap="square" lIns="54864" rIns="54864" tIns="18288" bIns="18288">
+          <a:bodyPr wrap="square" lIns="54864" tIns="18288" rIns="54864" bIns="18288">
             <a:spAutoFit/>
           </a:bodyPr>
           <a:lstStyle/>
@@ -50184,15 +51747,12 @@
           </a:p>
           <a:p>
             <a:pPr algn="l"/>
-            <a:r>
-              <a:rPr sz="1200" b="0">
-                <a:solidFill>
-                  <a:srgbClr val="333333"/>
-                </a:solidFill>
-                <a:latin typeface="Consolas"/>
-              </a:rPr>
-              <a:t/>
-            </a:r>
+            <a:endParaRPr sz="1200" b="0">
+              <a:solidFill>
+                <a:srgbClr val="333333"/>
+              </a:solidFill>
+              <a:latin typeface="Consolas"/>
+            </a:endParaRPr>
           </a:p>
           <a:p>
             <a:pPr algn="l"/>
@@ -50311,6 +51871,7 @@
           <a:lstStyle/>
           <a:p>
             <a:pPr algn="ctr"/>
+            <a:endParaRPr/>
           </a:p>
         </p:txBody>
       </p:sp>
@@ -50357,6 +51918,7 @@
           <a:lstStyle/>
           <a:p>
             <a:pPr algn="ctr"/>
+            <a:endParaRPr/>
           </a:p>
         </p:txBody>
       </p:sp>
@@ -50401,6 +51963,7 @@
           <a:lstStyle/>
           <a:p>
             <a:pPr algn="ctr"/>
+            <a:endParaRPr/>
           </a:p>
         </p:txBody>
       </p:sp>
@@ -50421,7 +51984,7 @@
           <a:noFill/>
         </p:spPr>
         <p:txBody>
-          <a:bodyPr wrap="square" lIns="54864" rIns="54864" tIns="18288" bIns="18288">
+          <a:bodyPr wrap="square" lIns="54864" tIns="18288" rIns="54864" bIns="18288">
             <a:spAutoFit/>
           </a:bodyPr>
           <a:lstStyle/>
@@ -50456,7 +52019,7 @@
           <a:noFill/>
         </p:spPr>
         <p:txBody>
-          <a:bodyPr wrap="square" lIns="54864" rIns="54864" tIns="18288" bIns="18288">
+          <a:bodyPr wrap="square" lIns="54864" tIns="18288" rIns="54864" bIns="18288">
             <a:spAutoFit/>
           </a:bodyPr>
           <a:lstStyle/>
@@ -50486,6 +52049,15 @@
           </a:p>
           <a:p>
             <a:pPr algn="l"/>
+            <a:endParaRPr sz="1200" b="0">
+              <a:solidFill>
+                <a:srgbClr val="333333"/>
+              </a:solidFill>
+              <a:latin typeface="Consolas"/>
+            </a:endParaRPr>
+          </a:p>
+          <a:p>
+            <a:pPr algn="l"/>
             <a:r>
               <a:rPr sz="1200" b="0">
                 <a:solidFill>
@@ -50493,7 +52065,7 @@
                 </a:solidFill>
                 <a:latin typeface="Consolas"/>
               </a:rPr>
-              <a:t/>
+              <a:t>tỷ lệ trả lời sai   10,2%  không ngữ cảnh</a:t>
             </a:r>
           </a:p>
           <a:p>
@@ -50505,32 +52077,17 @@
                 </a:solidFill>
                 <a:latin typeface="Consolas"/>
               </a:rPr>
-              <a:t>tỷ lệ trả lời sai   10,2%  không ngữ cảnh</a:t>
+              <a:t>                 →  66,1%  ngữ cảnh không đủ</a:t>
             </a:r>
           </a:p>
           <a:p>
             <a:pPr algn="l"/>
-            <a:r>
-              <a:rPr sz="1200" b="0">
-                <a:solidFill>
-                  <a:srgbClr val="333333"/>
-                </a:solidFill>
-                <a:latin typeface="Consolas"/>
-              </a:rPr>
-              <a:t>                 →  66,1%  ngữ cảnh không đủ</a:t>
-            </a:r>
-          </a:p>
-          <a:p>
-            <a:pPr algn="l"/>
-            <a:r>
-              <a:rPr sz="1200" b="0">
-                <a:solidFill>
-                  <a:srgbClr val="333333"/>
-                </a:solidFill>
-                <a:latin typeface="Consolas"/>
-              </a:rPr>
-              <a:t/>
-            </a:r>
+            <a:endParaRPr sz="1200" b="0">
+              <a:solidFill>
+                <a:srgbClr val="333333"/>
+              </a:solidFill>
+              <a:latin typeface="Consolas"/>
+            </a:endParaRPr>
           </a:p>
           <a:p>
             <a:pPr algn="l"/>
@@ -50625,6 +52182,7 @@
           <a:lstStyle/>
           <a:p>
             <a:pPr algn="ctr"/>
+            <a:endParaRPr/>
           </a:p>
         </p:txBody>
       </p:sp>
@@ -50671,6 +52229,7 @@
           <a:lstStyle/>
           <a:p>
             <a:pPr algn="ctr"/>
+            <a:endParaRPr/>
           </a:p>
         </p:txBody>
       </p:sp>
@@ -50715,6 +52274,7 @@
           <a:lstStyle/>
           <a:p>
             <a:pPr algn="ctr"/>
+            <a:endParaRPr/>
           </a:p>
         </p:txBody>
       </p:sp>
@@ -50727,7 +52287,7 @@
         <p:spPr>
           <a:xfrm>
             <a:off x="676656" y="3705148"/>
-            <a:ext cx="10817352" cy="292608"/>
+            <a:ext cx="10817352" cy="267766"/>
           </a:xfrm>
           <a:prstGeom prst="rect">
             <a:avLst/>
@@ -50735,21 +52295,198 @@
           <a:noFill/>
         </p:spPr>
         <p:txBody>
-          <a:bodyPr wrap="square" lIns="54864" rIns="54864" tIns="18288" bIns="18288">
+          <a:bodyPr wrap="square" lIns="54864" tIns="18288" rIns="54864" bIns="18288">
             <a:spAutoFit/>
           </a:bodyPr>
           <a:lstStyle/>
           <a:p>
             <a:pPr algn="l"/>
             <a:r>
-              <a:rPr sz="1500" b="1">
+              <a:rPr sz="1500" b="1" dirty="0" err="1">
                 <a:solidFill>
                   <a:srgbClr val="FFFFFF"/>
                 </a:solidFill>
                 <a:latin typeface="Arial"/>
               </a:rPr>
-              <a:t>Vì sao giữ TÁCH khỏi v, không gộp thành một điểm số</a:t>
-            </a:r>
+              <a:t>Vì</a:t>
+            </a:r>
+            <a:r>
+              <a:rPr sz="1500" b="1" dirty="0">
+                <a:solidFill>
+                  <a:srgbClr val="FFFFFF"/>
+                </a:solidFill>
+                <a:latin typeface="Arial"/>
+              </a:rPr>
+              <a:t> </a:t>
+            </a:r>
+            <a:r>
+              <a:rPr sz="1500" b="1" dirty="0" err="1">
+                <a:solidFill>
+                  <a:srgbClr val="FFFFFF"/>
+                </a:solidFill>
+                <a:latin typeface="Arial"/>
+              </a:rPr>
+              <a:t>sao</a:t>
+            </a:r>
+            <a:r>
+              <a:rPr sz="1500" b="1" dirty="0">
+                <a:solidFill>
+                  <a:srgbClr val="FFFFFF"/>
+                </a:solidFill>
+                <a:latin typeface="Arial"/>
+              </a:rPr>
+              <a:t> </a:t>
+            </a:r>
+            <a:r>
+              <a:rPr sz="1500" b="1" dirty="0" err="1">
+                <a:solidFill>
+                  <a:srgbClr val="FFFFFF"/>
+                </a:solidFill>
+                <a:latin typeface="Arial"/>
+              </a:rPr>
+              <a:t>giữ</a:t>
+            </a:r>
+            <a:r>
+              <a:rPr sz="1500" b="1" dirty="0">
+                <a:solidFill>
+                  <a:srgbClr val="FFFFFF"/>
+                </a:solidFill>
+                <a:latin typeface="Arial"/>
+              </a:rPr>
+              <a:t> </a:t>
+            </a:r>
+            <a:r>
+              <a:rPr lang="vi-VN" sz="1500" b="1" dirty="0">
+                <a:solidFill>
+                  <a:srgbClr val="FFFFFF"/>
+                </a:solidFill>
+                <a:latin typeface="Arial"/>
+              </a:rPr>
+              <a:t>tách </a:t>
+            </a:r>
+            <a:r>
+              <a:rPr sz="1500" b="1" dirty="0" err="1">
+                <a:solidFill>
+                  <a:srgbClr val="FFFFFF"/>
+                </a:solidFill>
+                <a:latin typeface="Arial"/>
+              </a:rPr>
+              <a:t>khỏi</a:t>
+            </a:r>
+            <a:r>
+              <a:rPr sz="1500" b="1" dirty="0">
+                <a:solidFill>
+                  <a:srgbClr val="FFFFFF"/>
+                </a:solidFill>
+                <a:latin typeface="Arial"/>
+              </a:rPr>
+              <a:t> v, </a:t>
+            </a:r>
+            <a:r>
+              <a:rPr sz="1500" b="1" dirty="0" err="1">
+                <a:solidFill>
+                  <a:srgbClr val="FFFFFF"/>
+                </a:solidFill>
+                <a:latin typeface="Arial"/>
+              </a:rPr>
+              <a:t>không</a:t>
+            </a:r>
+            <a:r>
+              <a:rPr sz="1500" b="1" dirty="0">
+                <a:solidFill>
+                  <a:srgbClr val="FFFFFF"/>
+                </a:solidFill>
+                <a:latin typeface="Arial"/>
+              </a:rPr>
+              <a:t> </a:t>
+            </a:r>
+            <a:r>
+              <a:rPr sz="1500" b="1" dirty="0" err="1">
+                <a:solidFill>
+                  <a:srgbClr val="FFFFFF"/>
+                </a:solidFill>
+                <a:latin typeface="Arial"/>
+              </a:rPr>
+              <a:t>gộp</a:t>
+            </a:r>
+            <a:r>
+              <a:rPr sz="1500" b="1" dirty="0">
+                <a:solidFill>
+                  <a:srgbClr val="FFFFFF"/>
+                </a:solidFill>
+                <a:latin typeface="Arial"/>
+              </a:rPr>
+              <a:t> </a:t>
+            </a:r>
+            <a:r>
+              <a:rPr sz="1500" b="1" dirty="0" err="1">
+                <a:solidFill>
+                  <a:srgbClr val="FFFFFF"/>
+                </a:solidFill>
+                <a:latin typeface="Arial"/>
+              </a:rPr>
+              <a:t>thành</a:t>
+            </a:r>
+            <a:r>
+              <a:rPr sz="1500" b="1" dirty="0">
+                <a:solidFill>
+                  <a:srgbClr val="FFFFFF"/>
+                </a:solidFill>
+                <a:latin typeface="Arial"/>
+              </a:rPr>
+              <a:t> </a:t>
+            </a:r>
+            <a:r>
+              <a:rPr sz="1500" b="1" dirty="0" err="1">
+                <a:solidFill>
+                  <a:srgbClr val="FFFFFF"/>
+                </a:solidFill>
+                <a:latin typeface="Arial"/>
+              </a:rPr>
+              <a:t>một</a:t>
+            </a:r>
+            <a:r>
+              <a:rPr sz="1500" b="1" dirty="0">
+                <a:solidFill>
+                  <a:srgbClr val="FFFFFF"/>
+                </a:solidFill>
+                <a:latin typeface="Arial"/>
+              </a:rPr>
+              <a:t> </a:t>
+            </a:r>
+            <a:r>
+              <a:rPr sz="1500" b="1" dirty="0" err="1">
+                <a:solidFill>
+                  <a:srgbClr val="FFFFFF"/>
+                </a:solidFill>
+                <a:latin typeface="Arial"/>
+              </a:rPr>
+              <a:t>điểm</a:t>
+            </a:r>
+            <a:r>
+              <a:rPr sz="1500" b="1" dirty="0">
+                <a:solidFill>
+                  <a:srgbClr val="FFFFFF"/>
+                </a:solidFill>
+                <a:latin typeface="Arial"/>
+              </a:rPr>
+              <a:t> </a:t>
+            </a:r>
+            <a:r>
+              <a:rPr sz="1500" b="1" dirty="0" err="1">
+                <a:solidFill>
+                  <a:srgbClr val="FFFFFF"/>
+                </a:solidFill>
+                <a:latin typeface="Arial"/>
+              </a:rPr>
+              <a:t>số</a:t>
+            </a:r>
+            <a:endParaRPr sz="1500" b="1" dirty="0">
+              <a:solidFill>
+                <a:srgbClr val="FFFFFF"/>
+              </a:solidFill>
+              <a:latin typeface="Arial"/>
+            </a:endParaRPr>
           </a:p>
         </p:txBody>
       </p:sp>
@@ -50770,7 +52507,7 @@
           <a:noFill/>
         </p:spPr>
         <p:txBody>
-          <a:bodyPr wrap="square" lIns="54864" rIns="54864" tIns="18288" bIns="18288">
+          <a:bodyPr wrap="square" lIns="54864" tIns="18288" rIns="54864" bIns="18288">
             <a:spAutoFit/>
           </a:bodyPr>
           <a:lstStyle/>
@@ -50833,7 +52570,7 @@
 </file>
 
 <file path=ppt/slides/slide9.xml><?xml version="1.0" encoding="utf-8"?>
-<p:sld xmlns:a="http://schemas.openxmlformats.org/drawingml/2006/main" xmlns:p="http://schemas.openxmlformats.org/presentationml/2006/main" xmlns:r="http://schemas.openxmlformats.org/officeDocument/2006/relationships">
+<p:sld xmlns:a="http://schemas.openxmlformats.org/drawingml/2006/main" xmlns:r="http://schemas.openxmlformats.org/officeDocument/2006/relationships" xmlns:p="http://schemas.openxmlformats.org/presentationml/2006/main">
   <p:cSld>
     <p:spTree>
       <p:nvGrpSpPr>
@@ -50841,7 +52578,14 @@
         <p:cNvGrpSpPr/>
         <p:nvPr/>
       </p:nvGrpSpPr>
-      <p:grpSpPr/>
+      <p:grpSpPr>
+        <a:xfrm>
+          <a:off x="0" y="0"/>
+          <a:ext cx="0" cy="0"/>
+          <a:chOff x="0" y="0"/>
+          <a:chExt cx="0" cy="0"/>
+        </a:xfrm>
+      </p:grpSpPr>
       <p:sp>
         <p:nvSpPr>
           <p:cNvPr id="2" name="Rectangle 1"/>
@@ -50883,6 +52627,7 @@
           <a:lstStyle/>
           <a:p>
             <a:pPr algn="ctr"/>
+            <a:endParaRPr/>
           </a:p>
         </p:txBody>
       </p:sp>
@@ -50903,7 +52648,7 @@
           <a:noFill/>
         </p:spPr>
         <p:txBody>
-          <a:bodyPr wrap="square" lIns="54864" rIns="54864" tIns="18288" bIns="18288">
+          <a:bodyPr wrap="square" lIns="54864" tIns="18288" rIns="54864" bIns="18288">
             <a:spAutoFit/>
           </a:bodyPr>
           <a:lstStyle/>
@@ -50962,6 +52707,7 @@
           <a:lstStyle/>
           <a:p>
             <a:pPr algn="ctr"/>
+            <a:endParaRPr/>
           </a:p>
         </p:txBody>
       </p:sp>
@@ -50982,7 +52728,7 @@
           <a:noFill/>
         </p:spPr>
         <p:txBody>
-          <a:bodyPr wrap="square" lIns="54864" rIns="54864" tIns="18288" bIns="18288">
+          <a:bodyPr wrap="square" lIns="54864" tIns="18288" rIns="54864" bIns="18288">
             <a:spAutoFit/>
           </a:bodyPr>
           <a:lstStyle/>
@@ -51017,7 +52763,7 @@
           <a:noFill/>
         </p:spPr>
         <p:txBody>
-          <a:bodyPr wrap="square" lIns="54864" rIns="54864" tIns="18288" bIns="18288">
+          <a:bodyPr wrap="square" lIns="54864" tIns="18288" rIns="54864" bIns="18288">
             <a:spAutoFit/>
           </a:bodyPr>
           <a:lstStyle/>
@@ -51052,7 +52798,7 @@
           <a:noFill/>
         </p:spPr>
         <p:txBody>
-          <a:bodyPr wrap="square" lIns="54864" rIns="54864" tIns="18288" bIns="18288">
+          <a:bodyPr wrap="square" lIns="54864" tIns="18288" rIns="54864" bIns="18288">
             <a:spAutoFit/>
           </a:bodyPr>
           <a:lstStyle/>
@@ -51113,6 +52859,7 @@
           <a:lstStyle/>
           <a:p>
             <a:pPr algn="ctr"/>
+            <a:endParaRPr/>
           </a:p>
         </p:txBody>
       </p:sp>
@@ -51159,6 +52906,7 @@
           <a:lstStyle/>
           <a:p>
             <a:pPr algn="ctr"/>
+            <a:endParaRPr/>
           </a:p>
         </p:txBody>
       </p:sp>
@@ -51203,6 +52951,7 @@
           <a:lstStyle/>
           <a:p>
             <a:pPr algn="ctr"/>
+            <a:endParaRPr/>
           </a:p>
         </p:txBody>
       </p:sp>
@@ -51223,7 +52972,7 @@
           <a:noFill/>
         </p:spPr>
         <p:txBody>
-          <a:bodyPr wrap="square" lIns="54864" rIns="54864" tIns="18288" bIns="18288">
+          <a:bodyPr wrap="square" lIns="54864" tIns="18288" rIns="54864" bIns="18288">
             <a:spAutoFit/>
           </a:bodyPr>
           <a:lstStyle/>
@@ -51258,7 +53007,7 @@
           <a:noFill/>
         </p:spPr>
         <p:txBody>
-          <a:bodyPr wrap="square" lIns="54864" rIns="54864" tIns="18288" bIns="18288">
+          <a:bodyPr wrap="square" lIns="54864" tIns="18288" rIns="54864" bIns="18288">
             <a:spAutoFit/>
           </a:bodyPr>
           <a:lstStyle/>
@@ -51336,15 +53085,12 @@
           </a:p>
           <a:p>
             <a:pPr algn="l"/>
-            <a:r>
-              <a:rPr sz="1200" b="0">
-                <a:solidFill>
-                  <a:srgbClr val="333333"/>
-                </a:solidFill>
-                <a:latin typeface="Consolas"/>
-              </a:rPr>
-              <a:t/>
-            </a:r>
+            <a:endParaRPr sz="1200" b="0">
+              <a:solidFill>
+                <a:srgbClr val="333333"/>
+              </a:solidFill>
+              <a:latin typeface="Consolas"/>
+            </a:endParaRPr>
           </a:p>
           <a:p>
             <a:pPr algn="l"/>
@@ -51427,6 +53173,7 @@
           <a:lstStyle/>
           <a:p>
             <a:pPr algn="ctr"/>
+            <a:endParaRPr/>
           </a:p>
         </p:txBody>
       </p:sp>
@@ -51473,6 +53220,7 @@
           <a:lstStyle/>
           <a:p>
             <a:pPr algn="ctr"/>
+            <a:endParaRPr/>
           </a:p>
         </p:txBody>
       </p:sp>
@@ -51517,6 +53265,7 @@
           <a:lstStyle/>
           <a:p>
             <a:pPr algn="ctr"/>
+            <a:endParaRPr/>
           </a:p>
         </p:txBody>
       </p:sp>
@@ -51537,7 +53286,7 @@
           <a:noFill/>
         </p:spPr>
         <p:txBody>
-          <a:bodyPr wrap="square" lIns="54864" rIns="54864" tIns="18288" bIns="18288">
+          <a:bodyPr wrap="square" lIns="54864" tIns="18288" rIns="54864" bIns="18288">
             <a:spAutoFit/>
           </a:bodyPr>
           <a:lstStyle/>
@@ -51572,7 +53321,7 @@
           <a:noFill/>
         </p:spPr>
         <p:txBody>
-          <a:bodyPr wrap="square" lIns="54864" rIns="54864" tIns="18288" bIns="18288">
+          <a:bodyPr wrap="square" lIns="54864" tIns="18288" rIns="54864" bIns="18288">
             <a:spAutoFit/>
           </a:bodyPr>
           <a:lstStyle/>
@@ -51674,15 +53423,12 @@
           </a:p>
           <a:p>
             <a:pPr algn="l"/>
-            <a:r>
-              <a:rPr sz="1200" b="0">
-                <a:solidFill>
-                  <a:srgbClr val="333333"/>
-                </a:solidFill>
-                <a:latin typeface="Consolas"/>
-              </a:rPr>
-              <a:t/>
-            </a:r>
+            <a:endParaRPr sz="1200" b="0">
+              <a:solidFill>
+                <a:srgbClr val="333333"/>
+              </a:solidFill>
+              <a:latin typeface="Consolas"/>
+            </a:endParaRPr>
           </a:p>
           <a:p>
             <a:pPr algn="l"/>
@@ -51753,6 +53499,7 @@
           <a:lstStyle/>
           <a:p>
             <a:pPr algn="ctr"/>
+            <a:endParaRPr/>
           </a:p>
         </p:txBody>
       </p:sp>
@@ -51799,6 +53546,7 @@
           <a:lstStyle/>
           <a:p>
             <a:pPr algn="ctr"/>
+            <a:endParaRPr/>
           </a:p>
         </p:txBody>
       </p:sp>
@@ -51843,6 +53591,7 @@
           <a:lstStyle/>
           <a:p>
             <a:pPr algn="ctr"/>
+            <a:endParaRPr/>
           </a:p>
         </p:txBody>
       </p:sp>
@@ -51863,7 +53612,7 @@
           <a:noFill/>
         </p:spPr>
         <p:txBody>
-          <a:bodyPr wrap="square" lIns="54864" rIns="54864" tIns="18288" bIns="18288">
+          <a:bodyPr wrap="square" lIns="54864" tIns="18288" rIns="54864" bIns="18288">
             <a:spAutoFit/>
           </a:bodyPr>
           <a:lstStyle/>
@@ -51898,7 +53647,7 @@
           <a:noFill/>
         </p:spPr>
         <p:txBody>
-          <a:bodyPr wrap="square" lIns="54864" rIns="54864" tIns="18288" bIns="18288">
+          <a:bodyPr wrap="square" lIns="54864" tIns="18288" rIns="54864" bIns="18288">
             <a:spAutoFit/>
           </a:bodyPr>
           <a:lstStyle/>
